--- a/output/figure5_editable/20261013-163435-Figure5_resource_map/final/Figure5_resource_map_edited.pptx
+++ b/output/figure5_editable/20261013-163435-Figure5_resource_map/final/Figure5_resource_map_edited.pptx
@@ -7,8 +7,103 @@
   <p:sldIdLst>
     <p:sldId id="256" r:id="rId2"/>
   </p:sldIdLst>
-  <p:sldSz cx="12191695" cy="6858000" type="screen16x9"/>
+  <p:sldSz cx="12192000" cy="6858000"/>
   <p:notesSz cx="6858000" cy="9144000"/>
+  <p:defaultTextStyle>
+    <a:defPPr>
+      <a:defRPr lang="zh-CN"/>
+    </a:defPPr>
+    <a:lvl1pPr marL="0" algn="l" defTabSz="914400" rtl="0" eaLnBrk="1" latinLnBrk="0" hangingPunct="1">
+      <a:defRPr sz="1800" kern="1200">
+        <a:solidFill>
+          <a:schemeClr val="tx1"/>
+        </a:solidFill>
+        <a:latin typeface="+mn-lt"/>
+        <a:ea typeface="+mn-ea"/>
+        <a:cs typeface="+mn-cs"/>
+      </a:defRPr>
+    </a:lvl1pPr>
+    <a:lvl2pPr marL="457200" algn="l" defTabSz="914400" rtl="0" eaLnBrk="1" latinLnBrk="0" hangingPunct="1">
+      <a:defRPr sz="1800" kern="1200">
+        <a:solidFill>
+          <a:schemeClr val="tx1"/>
+        </a:solidFill>
+        <a:latin typeface="+mn-lt"/>
+        <a:ea typeface="+mn-ea"/>
+        <a:cs typeface="+mn-cs"/>
+      </a:defRPr>
+    </a:lvl2pPr>
+    <a:lvl3pPr marL="914400" algn="l" defTabSz="914400" rtl="0" eaLnBrk="1" latinLnBrk="0" hangingPunct="1">
+      <a:defRPr sz="1800" kern="1200">
+        <a:solidFill>
+          <a:schemeClr val="tx1"/>
+        </a:solidFill>
+        <a:latin typeface="+mn-lt"/>
+        <a:ea typeface="+mn-ea"/>
+        <a:cs typeface="+mn-cs"/>
+      </a:defRPr>
+    </a:lvl3pPr>
+    <a:lvl4pPr marL="1371600" algn="l" defTabSz="914400" rtl="0" eaLnBrk="1" latinLnBrk="0" hangingPunct="1">
+      <a:defRPr sz="1800" kern="1200">
+        <a:solidFill>
+          <a:schemeClr val="tx1"/>
+        </a:solidFill>
+        <a:latin typeface="+mn-lt"/>
+        <a:ea typeface="+mn-ea"/>
+        <a:cs typeface="+mn-cs"/>
+      </a:defRPr>
+    </a:lvl4pPr>
+    <a:lvl5pPr marL="1828800" algn="l" defTabSz="914400" rtl="0" eaLnBrk="1" latinLnBrk="0" hangingPunct="1">
+      <a:defRPr sz="1800" kern="1200">
+        <a:solidFill>
+          <a:schemeClr val="tx1"/>
+        </a:solidFill>
+        <a:latin typeface="+mn-lt"/>
+        <a:ea typeface="+mn-ea"/>
+        <a:cs typeface="+mn-cs"/>
+      </a:defRPr>
+    </a:lvl5pPr>
+    <a:lvl6pPr marL="2286000" algn="l" defTabSz="914400" rtl="0" eaLnBrk="1" latinLnBrk="0" hangingPunct="1">
+      <a:defRPr sz="1800" kern="1200">
+        <a:solidFill>
+          <a:schemeClr val="tx1"/>
+        </a:solidFill>
+        <a:latin typeface="+mn-lt"/>
+        <a:ea typeface="+mn-ea"/>
+        <a:cs typeface="+mn-cs"/>
+      </a:defRPr>
+    </a:lvl6pPr>
+    <a:lvl7pPr marL="2743200" algn="l" defTabSz="914400" rtl="0" eaLnBrk="1" latinLnBrk="0" hangingPunct="1">
+      <a:defRPr sz="1800" kern="1200">
+        <a:solidFill>
+          <a:schemeClr val="tx1"/>
+        </a:solidFill>
+        <a:latin typeface="+mn-lt"/>
+        <a:ea typeface="+mn-ea"/>
+        <a:cs typeface="+mn-cs"/>
+      </a:defRPr>
+    </a:lvl7pPr>
+    <a:lvl8pPr marL="3200400" algn="l" defTabSz="914400" rtl="0" eaLnBrk="1" latinLnBrk="0" hangingPunct="1">
+      <a:defRPr sz="1800" kern="1200">
+        <a:solidFill>
+          <a:schemeClr val="tx1"/>
+        </a:solidFill>
+        <a:latin typeface="+mn-lt"/>
+        <a:ea typeface="+mn-ea"/>
+        <a:cs typeface="+mn-cs"/>
+      </a:defRPr>
+    </a:lvl8pPr>
+    <a:lvl9pPr marL="3657600" algn="l" defTabSz="914400" rtl="0" eaLnBrk="1" latinLnBrk="0" hangingPunct="1">
+      <a:defRPr sz="1800" kern="1200">
+        <a:solidFill>
+          <a:schemeClr val="tx1"/>
+        </a:solidFill>
+        <a:latin typeface="+mn-lt"/>
+        <a:ea typeface="+mn-ea"/>
+        <a:cs typeface="+mn-cs"/>
+      </a:defRPr>
+    </a:lvl9pPr>
+  </p:defaultTextStyle>
 </p:presentation>
 </file>
 
@@ -21,7 +116,14 @@
         <p:cNvGrpSpPr/>
         <p:nvPr/>
       </p:nvGrpSpPr>
-      <p:grpSpPr/>
+      <p:grpSpPr>
+        <a:xfrm>
+          <a:off x="0" y="0"/>
+          <a:ext cx="0" cy="0"/>
+          <a:chOff x="0" y="0"/>
+          <a:chExt cx="0" cy="0"/>
+        </a:xfrm>
+      </p:grpSpPr>
     </p:spTree>
   </p:cSld>
   <p:clrMapOvr>
@@ -33,24 +135,316 @@
 <file path=ppt/slideMasters/slideMaster1.xml><?xml version="1.0" encoding="utf-8"?>
 <p:sldMaster xmlns:a="http://schemas.openxmlformats.org/drawingml/2006/main" xmlns:r="http://schemas.openxmlformats.org/officeDocument/2006/relationships" xmlns:p="http://schemas.openxmlformats.org/presentationml/2006/main">
   <p:cSld>
+    <p:bg>
+      <p:bgRef idx="1001">
+        <a:schemeClr val="bg1"/>
+      </p:bgRef>
+    </p:bg>
     <p:spTree>
       <p:nvGrpSpPr>
         <p:cNvPr id="1" name=""/>
         <p:cNvGrpSpPr/>
         <p:nvPr/>
       </p:nvGrpSpPr>
-      <p:grpSpPr/>
+      <p:grpSpPr>
+        <a:xfrm>
+          <a:off x="0" y="0"/>
+          <a:ext cx="0" cy="0"/>
+          <a:chOff x="0" y="0"/>
+          <a:chExt cx="0" cy="0"/>
+        </a:xfrm>
+      </p:grpSpPr>
     </p:spTree>
   </p:cSld>
   <p:clrMap bg1="lt1" tx1="dk1" bg2="lt2" tx2="dk2" accent1="accent1" accent2="accent2" accent3="accent3" accent4="accent4" accent5="accent5" accent6="accent6" hlink="hlink" folHlink="folHlink"/>
   <p:sldLayoutIdLst>
     <p:sldLayoutId id="2147483649" r:id="rId1"/>
   </p:sldLayoutIdLst>
+  <p:txStyles>
+    <p:titleStyle>
+      <a:lvl1pPr algn="l" defTabSz="914400" rtl="0" eaLnBrk="1" latinLnBrk="0" hangingPunct="1">
+        <a:lnSpc>
+          <a:spcPct val="90000"/>
+        </a:lnSpc>
+        <a:spcBef>
+          <a:spcPct val="0"/>
+        </a:spcBef>
+        <a:buNone/>
+        <a:defRPr sz="4400" kern="1200">
+          <a:solidFill>
+            <a:schemeClr val="tx1"/>
+          </a:solidFill>
+          <a:latin typeface="+mj-lt"/>
+          <a:ea typeface="+mj-ea"/>
+          <a:cs typeface="+mj-cs"/>
+        </a:defRPr>
+      </a:lvl1pPr>
+    </p:titleStyle>
+    <p:bodyStyle>
+      <a:lvl1pPr marL="228600" indent="-228600" algn="l" defTabSz="914400" rtl="0" eaLnBrk="1" latinLnBrk="0" hangingPunct="1">
+        <a:lnSpc>
+          <a:spcPct val="90000"/>
+        </a:lnSpc>
+        <a:spcBef>
+          <a:spcPts val="1000"/>
+        </a:spcBef>
+        <a:buFont typeface="Arial" panose="020B0604020202020204" pitchFamily="34" charset="0"/>
+        <a:buChar char="•"/>
+        <a:defRPr sz="2800" kern="1200">
+          <a:solidFill>
+            <a:schemeClr val="tx1"/>
+          </a:solidFill>
+          <a:latin typeface="+mn-lt"/>
+          <a:ea typeface="+mn-ea"/>
+          <a:cs typeface="+mn-cs"/>
+        </a:defRPr>
+      </a:lvl1pPr>
+      <a:lvl2pPr marL="685800" indent="-228600" algn="l" defTabSz="914400" rtl="0" eaLnBrk="1" latinLnBrk="0" hangingPunct="1">
+        <a:lnSpc>
+          <a:spcPct val="90000"/>
+        </a:lnSpc>
+        <a:spcBef>
+          <a:spcPts val="500"/>
+        </a:spcBef>
+        <a:buFont typeface="Arial" panose="020B0604020202020204" pitchFamily="34" charset="0"/>
+        <a:buChar char="•"/>
+        <a:defRPr sz="2400" kern="1200">
+          <a:solidFill>
+            <a:schemeClr val="tx1"/>
+          </a:solidFill>
+          <a:latin typeface="+mn-lt"/>
+          <a:ea typeface="+mn-ea"/>
+          <a:cs typeface="+mn-cs"/>
+        </a:defRPr>
+      </a:lvl2pPr>
+      <a:lvl3pPr marL="1143000" indent="-228600" algn="l" defTabSz="914400" rtl="0" eaLnBrk="1" latinLnBrk="0" hangingPunct="1">
+        <a:lnSpc>
+          <a:spcPct val="90000"/>
+        </a:lnSpc>
+        <a:spcBef>
+          <a:spcPts val="500"/>
+        </a:spcBef>
+        <a:buFont typeface="Arial" panose="020B0604020202020204" pitchFamily="34" charset="0"/>
+        <a:buChar char="•"/>
+        <a:defRPr sz="2000" kern="1200">
+          <a:solidFill>
+            <a:schemeClr val="tx1"/>
+          </a:solidFill>
+          <a:latin typeface="+mn-lt"/>
+          <a:ea typeface="+mn-ea"/>
+          <a:cs typeface="+mn-cs"/>
+        </a:defRPr>
+      </a:lvl3pPr>
+      <a:lvl4pPr marL="1600200" indent="-228600" algn="l" defTabSz="914400" rtl="0" eaLnBrk="1" latinLnBrk="0" hangingPunct="1">
+        <a:lnSpc>
+          <a:spcPct val="90000"/>
+        </a:lnSpc>
+        <a:spcBef>
+          <a:spcPts val="500"/>
+        </a:spcBef>
+        <a:buFont typeface="Arial" panose="020B0604020202020204" pitchFamily="34" charset="0"/>
+        <a:buChar char="•"/>
+        <a:defRPr sz="1800" kern="1200">
+          <a:solidFill>
+            <a:schemeClr val="tx1"/>
+          </a:solidFill>
+          <a:latin typeface="+mn-lt"/>
+          <a:ea typeface="+mn-ea"/>
+          <a:cs typeface="+mn-cs"/>
+        </a:defRPr>
+      </a:lvl4pPr>
+      <a:lvl5pPr marL="2057400" indent="-228600" algn="l" defTabSz="914400" rtl="0" eaLnBrk="1" latinLnBrk="0" hangingPunct="1">
+        <a:lnSpc>
+          <a:spcPct val="90000"/>
+        </a:lnSpc>
+        <a:spcBef>
+          <a:spcPts val="500"/>
+        </a:spcBef>
+        <a:buFont typeface="Arial" panose="020B0604020202020204" pitchFamily="34" charset="0"/>
+        <a:buChar char="•"/>
+        <a:defRPr sz="1800" kern="1200">
+          <a:solidFill>
+            <a:schemeClr val="tx1"/>
+          </a:solidFill>
+          <a:latin typeface="+mn-lt"/>
+          <a:ea typeface="+mn-ea"/>
+          <a:cs typeface="+mn-cs"/>
+        </a:defRPr>
+      </a:lvl5pPr>
+      <a:lvl6pPr marL="2514600" indent="-228600" algn="l" defTabSz="914400" rtl="0" eaLnBrk="1" latinLnBrk="0" hangingPunct="1">
+        <a:lnSpc>
+          <a:spcPct val="90000"/>
+        </a:lnSpc>
+        <a:spcBef>
+          <a:spcPts val="500"/>
+        </a:spcBef>
+        <a:buFont typeface="Arial" panose="020B0604020202020204" pitchFamily="34" charset="0"/>
+        <a:buChar char="•"/>
+        <a:defRPr sz="1800" kern="1200">
+          <a:solidFill>
+            <a:schemeClr val="tx1"/>
+          </a:solidFill>
+          <a:latin typeface="+mn-lt"/>
+          <a:ea typeface="+mn-ea"/>
+          <a:cs typeface="+mn-cs"/>
+        </a:defRPr>
+      </a:lvl6pPr>
+      <a:lvl7pPr marL="2971800" indent="-228600" algn="l" defTabSz="914400" rtl="0" eaLnBrk="1" latinLnBrk="0" hangingPunct="1">
+        <a:lnSpc>
+          <a:spcPct val="90000"/>
+        </a:lnSpc>
+        <a:spcBef>
+          <a:spcPts val="500"/>
+        </a:spcBef>
+        <a:buFont typeface="Arial" panose="020B0604020202020204" pitchFamily="34" charset="0"/>
+        <a:buChar char="•"/>
+        <a:defRPr sz="1800" kern="1200">
+          <a:solidFill>
+            <a:schemeClr val="tx1"/>
+          </a:solidFill>
+          <a:latin typeface="+mn-lt"/>
+          <a:ea typeface="+mn-ea"/>
+          <a:cs typeface="+mn-cs"/>
+        </a:defRPr>
+      </a:lvl7pPr>
+      <a:lvl8pPr marL="3429000" indent="-228600" algn="l" defTabSz="914400" rtl="0" eaLnBrk="1" latinLnBrk="0" hangingPunct="1">
+        <a:lnSpc>
+          <a:spcPct val="90000"/>
+        </a:lnSpc>
+        <a:spcBef>
+          <a:spcPts val="500"/>
+        </a:spcBef>
+        <a:buFont typeface="Arial" panose="020B0604020202020204" pitchFamily="34" charset="0"/>
+        <a:buChar char="•"/>
+        <a:defRPr sz="1800" kern="1200">
+          <a:solidFill>
+            <a:schemeClr val="tx1"/>
+          </a:solidFill>
+          <a:latin typeface="+mn-lt"/>
+          <a:ea typeface="+mn-ea"/>
+          <a:cs typeface="+mn-cs"/>
+        </a:defRPr>
+      </a:lvl8pPr>
+      <a:lvl9pPr marL="3886200" indent="-228600" algn="l" defTabSz="914400" rtl="0" eaLnBrk="1" latinLnBrk="0" hangingPunct="1">
+        <a:lnSpc>
+          <a:spcPct val="90000"/>
+        </a:lnSpc>
+        <a:spcBef>
+          <a:spcPts val="500"/>
+        </a:spcBef>
+        <a:buFont typeface="Arial" panose="020B0604020202020204" pitchFamily="34" charset="0"/>
+        <a:buChar char="•"/>
+        <a:defRPr sz="1800" kern="1200">
+          <a:solidFill>
+            <a:schemeClr val="tx1"/>
+          </a:solidFill>
+          <a:latin typeface="+mn-lt"/>
+          <a:ea typeface="+mn-ea"/>
+          <a:cs typeface="+mn-cs"/>
+        </a:defRPr>
+      </a:lvl9pPr>
+    </p:bodyStyle>
+    <p:otherStyle>
+      <a:defPPr>
+        <a:defRPr lang="zh-CN"/>
+      </a:defPPr>
+      <a:lvl1pPr marL="0" algn="l" defTabSz="914400" rtl="0" eaLnBrk="1" latinLnBrk="0" hangingPunct="1">
+        <a:defRPr sz="1800" kern="1200">
+          <a:solidFill>
+            <a:schemeClr val="tx1"/>
+          </a:solidFill>
+          <a:latin typeface="+mn-lt"/>
+          <a:ea typeface="+mn-ea"/>
+          <a:cs typeface="+mn-cs"/>
+        </a:defRPr>
+      </a:lvl1pPr>
+      <a:lvl2pPr marL="457200" algn="l" defTabSz="914400" rtl="0" eaLnBrk="1" latinLnBrk="0" hangingPunct="1">
+        <a:defRPr sz="1800" kern="1200">
+          <a:solidFill>
+            <a:schemeClr val="tx1"/>
+          </a:solidFill>
+          <a:latin typeface="+mn-lt"/>
+          <a:ea typeface="+mn-ea"/>
+          <a:cs typeface="+mn-cs"/>
+        </a:defRPr>
+      </a:lvl2pPr>
+      <a:lvl3pPr marL="914400" algn="l" defTabSz="914400" rtl="0" eaLnBrk="1" latinLnBrk="0" hangingPunct="1">
+        <a:defRPr sz="1800" kern="1200">
+          <a:solidFill>
+            <a:schemeClr val="tx1"/>
+          </a:solidFill>
+          <a:latin typeface="+mn-lt"/>
+          <a:ea typeface="+mn-ea"/>
+          <a:cs typeface="+mn-cs"/>
+        </a:defRPr>
+      </a:lvl3pPr>
+      <a:lvl4pPr marL="1371600" algn="l" defTabSz="914400" rtl="0" eaLnBrk="1" latinLnBrk="0" hangingPunct="1">
+        <a:defRPr sz="1800" kern="1200">
+          <a:solidFill>
+            <a:schemeClr val="tx1"/>
+          </a:solidFill>
+          <a:latin typeface="+mn-lt"/>
+          <a:ea typeface="+mn-ea"/>
+          <a:cs typeface="+mn-cs"/>
+        </a:defRPr>
+      </a:lvl4pPr>
+      <a:lvl5pPr marL="1828800" algn="l" defTabSz="914400" rtl="0" eaLnBrk="1" latinLnBrk="0" hangingPunct="1">
+        <a:defRPr sz="1800" kern="1200">
+          <a:solidFill>
+            <a:schemeClr val="tx1"/>
+          </a:solidFill>
+          <a:latin typeface="+mn-lt"/>
+          <a:ea typeface="+mn-ea"/>
+          <a:cs typeface="+mn-cs"/>
+        </a:defRPr>
+      </a:lvl5pPr>
+      <a:lvl6pPr marL="2286000" algn="l" defTabSz="914400" rtl="0" eaLnBrk="1" latinLnBrk="0" hangingPunct="1">
+        <a:defRPr sz="1800" kern="1200">
+          <a:solidFill>
+            <a:schemeClr val="tx1"/>
+          </a:solidFill>
+          <a:latin typeface="+mn-lt"/>
+          <a:ea typeface="+mn-ea"/>
+          <a:cs typeface="+mn-cs"/>
+        </a:defRPr>
+      </a:lvl6pPr>
+      <a:lvl7pPr marL="2743200" algn="l" defTabSz="914400" rtl="0" eaLnBrk="1" latinLnBrk="0" hangingPunct="1">
+        <a:defRPr sz="1800" kern="1200">
+          <a:solidFill>
+            <a:schemeClr val="tx1"/>
+          </a:solidFill>
+          <a:latin typeface="+mn-lt"/>
+          <a:ea typeface="+mn-ea"/>
+          <a:cs typeface="+mn-cs"/>
+        </a:defRPr>
+      </a:lvl7pPr>
+      <a:lvl8pPr marL="3200400" algn="l" defTabSz="914400" rtl="0" eaLnBrk="1" latinLnBrk="0" hangingPunct="1">
+        <a:defRPr sz="1800" kern="1200">
+          <a:solidFill>
+            <a:schemeClr val="tx1"/>
+          </a:solidFill>
+          <a:latin typeface="+mn-lt"/>
+          <a:ea typeface="+mn-ea"/>
+          <a:cs typeface="+mn-cs"/>
+        </a:defRPr>
+      </a:lvl8pPr>
+      <a:lvl9pPr marL="3657600" algn="l" defTabSz="914400" rtl="0" eaLnBrk="1" latinLnBrk="0" hangingPunct="1">
+        <a:defRPr sz="1800" kern="1200">
+          <a:solidFill>
+            <a:schemeClr val="tx1"/>
+          </a:solidFill>
+          <a:latin typeface="+mn-lt"/>
+          <a:ea typeface="+mn-ea"/>
+          <a:cs typeface="+mn-cs"/>
+        </a:defRPr>
+      </a:lvl9pPr>
+    </p:otherStyle>
+  </p:txStyles>
 </p:sldMaster>
 </file>
 
 <file path=ppt/slides/slide1.xml><?xml version="1.0" encoding="utf-8"?>
-<p:sld xmlns:a="http://schemas.openxmlformats.org/drawingml/2006/main" xmlns:p="http://schemas.openxmlformats.org/presentationml/2006/main">
+<p:sld xmlns:a="http://schemas.openxmlformats.org/drawingml/2006/main" xmlns:r="http://schemas.openxmlformats.org/officeDocument/2006/relationships" xmlns:p="http://schemas.openxmlformats.org/presentationml/2006/main">
   <p:cSld>
     <p:spTree>
       <p:nvGrpSpPr>
@@ -90,7 +484,9 @@
         <p:txBody>
           <a:bodyPr/>
           <a:lstStyle/>
-          <a:p/>
+          <a:p>
+            <a:endParaRPr/>
+          </a:p>
         </p:txBody>
       </p:sp>
       <p:sp>
@@ -117,7 +513,9 @@
         <p:txBody>
           <a:bodyPr/>
           <a:lstStyle/>
-          <a:p/>
+          <a:p>
+            <a:endParaRPr/>
+          </a:p>
         </p:txBody>
       </p:sp>
       <p:sp>
@@ -144,7 +542,9 @@
         <p:txBody>
           <a:bodyPr/>
           <a:lstStyle/>
-          <a:p/>
+          <a:p>
+            <a:endParaRPr/>
+          </a:p>
         </p:txBody>
       </p:sp>
       <p:sp>
@@ -171,7 +571,9 @@
         <p:txBody>
           <a:bodyPr/>
           <a:lstStyle/>
-          <a:p/>
+          <a:p>
+            <a:endParaRPr/>
+          </a:p>
         </p:txBody>
       </p:sp>
       <p:sp>
@@ -198,7 +600,9 @@
         <p:txBody>
           <a:bodyPr/>
           <a:lstStyle/>
-          <a:p/>
+          <a:p>
+            <a:endParaRPr/>
+          </a:p>
         </p:txBody>
       </p:sp>
       <p:sp>
@@ -225,7 +629,9 @@
         <p:txBody>
           <a:bodyPr/>
           <a:lstStyle/>
-          <a:p/>
+          <a:p>
+            <a:endParaRPr/>
+          </a:p>
         </p:txBody>
       </p:sp>
       <p:sp>
@@ -252,7 +658,9 @@
         <p:txBody>
           <a:bodyPr/>
           <a:lstStyle/>
-          <a:p/>
+          <a:p>
+            <a:endParaRPr/>
+          </a:p>
         </p:txBody>
       </p:sp>
       <p:sp>
@@ -279,7 +687,9 @@
         <p:txBody>
           <a:bodyPr/>
           <a:lstStyle/>
-          <a:p/>
+          <a:p>
+            <a:endParaRPr/>
+          </a:p>
         </p:txBody>
       </p:sp>
       <p:sp>
@@ -306,7 +716,9 @@
         <p:txBody>
           <a:bodyPr/>
           <a:lstStyle/>
-          <a:p/>
+          <a:p>
+            <a:endParaRPr/>
+          </a:p>
         </p:txBody>
       </p:sp>
       <p:sp>
@@ -333,7 +745,9 @@
         <p:txBody>
           <a:bodyPr/>
           <a:lstStyle/>
-          <a:p/>
+          <a:p>
+            <a:endParaRPr/>
+          </a:p>
         </p:txBody>
       </p:sp>
       <p:sp>
@@ -360,169 +774,9 @@
         <p:txBody>
           <a:bodyPr/>
           <a:lstStyle/>
-          <a:p/>
-        </p:txBody>
-      </p:sp>
-      <p:sp>
-        <p:nvSpPr>
-          <p:cNvPr id="13" name="llama-leg-0"/>
-          <p:cNvSpPr/>
-          <p:nvPr/>
-        </p:nvSpPr>
-        <p:spPr>
-          <a:xfrm flipH="1">
-            <a:off x="2954779" y="1727588"/>
-            <a:ext cx="17450" cy="157053"/>
-          </a:xfrm>
-          <a:prstGeom prst="line">
-            <a:avLst/>
-          </a:prstGeom>
-          <a:noFill/>
-          <a:ln w="29083">
-            <a:solidFill>
-              <a:srgbClr val="365466"/>
-            </a:solidFill>
-          </a:ln>
-        </p:spPr>
-        <p:txBody>
-          <a:bodyPr/>
-          <a:lstStyle/>
-          <a:p/>
-        </p:txBody>
-      </p:sp>
-      <p:sp>
-        <p:nvSpPr>
-          <p:cNvPr id="14" name="llama-leg-1"/>
-          <p:cNvSpPr/>
-          <p:nvPr/>
-        </p:nvSpPr>
-        <p:spPr>
-          <a:xfrm flipH="1">
-            <a:off x="3024580" y="1727588"/>
-            <a:ext cx="17450" cy="157053"/>
-          </a:xfrm>
-          <a:prstGeom prst="line">
-            <a:avLst/>
-          </a:prstGeom>
-          <a:noFill/>
-          <a:ln w="29083">
-            <a:solidFill>
-              <a:srgbClr val="365466"/>
-            </a:solidFill>
-          </a:ln>
-        </p:spPr>
-        <p:txBody>
-          <a:bodyPr/>
-          <a:lstStyle/>
-          <a:p/>
-        </p:txBody>
-      </p:sp>
-      <p:sp>
-        <p:nvSpPr>
-          <p:cNvPr id="15" name="llama-leg-2"/>
-          <p:cNvSpPr/>
-          <p:nvPr/>
-        </p:nvSpPr>
-        <p:spPr>
-          <a:xfrm flipH="1">
-            <a:off x="3129283" y="1727588"/>
-            <a:ext cx="17450" cy="157053"/>
-          </a:xfrm>
-          <a:prstGeom prst="line">
-            <a:avLst/>
-          </a:prstGeom>
-          <a:noFill/>
-          <a:ln w="29083">
-            <a:solidFill>
-              <a:srgbClr val="365466"/>
-            </a:solidFill>
-          </a:ln>
-        </p:spPr>
-        <p:txBody>
-          <a:bodyPr/>
-          <a:lstStyle/>
-          <a:p/>
-        </p:txBody>
-      </p:sp>
-      <p:sp>
-        <p:nvSpPr>
-          <p:cNvPr id="16" name="llama-tail"/>
-          <p:cNvSpPr/>
-          <p:nvPr/>
-        </p:nvSpPr>
-        <p:spPr>
-          <a:xfrm flipV="1">
-            <a:off x="3181634" y="1605435"/>
-            <a:ext cx="69802" cy="52351"/>
-          </a:xfrm>
-          <a:prstGeom prst="line">
-            <a:avLst/>
-          </a:prstGeom>
-          <a:noFill/>
-          <a:ln w="23267">
-            <a:solidFill>
-              <a:srgbClr val="365466"/>
-            </a:solidFill>
-          </a:ln>
-        </p:spPr>
-        <p:txBody>
-          <a:bodyPr/>
-          <a:lstStyle/>
-          <a:p/>
-        </p:txBody>
-      </p:sp>
-      <p:sp>
-        <p:nvSpPr>
-          <p:cNvPr id="17" name="index-edge-1"/>
-          <p:cNvSpPr/>
-          <p:nvPr/>
-        </p:nvSpPr>
-        <p:spPr>
-          <a:xfrm>
-            <a:off x="3338687" y="1518183"/>
-            <a:ext cx="0" cy="104702"/>
-          </a:xfrm>
-          <a:prstGeom prst="line">
-            <a:avLst/>
-          </a:prstGeom>
-          <a:noFill/>
-          <a:ln w="11633">
-            <a:solidFill>
-              <a:srgbClr val="365466"/>
-            </a:solidFill>
-          </a:ln>
-        </p:spPr>
-        <p:txBody>
-          <a:bodyPr/>
-          <a:lstStyle/>
-          <a:p/>
-        </p:txBody>
-      </p:sp>
-      <p:sp>
-        <p:nvSpPr>
-          <p:cNvPr id="18" name="index-edge-2"/>
-          <p:cNvSpPr/>
-          <p:nvPr/>
-        </p:nvSpPr>
-        <p:spPr>
-          <a:xfrm>
-            <a:off x="3338687" y="1692687"/>
-            <a:ext cx="0" cy="104702"/>
-          </a:xfrm>
-          <a:prstGeom prst="line">
-            <a:avLst/>
-          </a:prstGeom>
-          <a:noFill/>
-          <a:ln w="11633">
-            <a:solidFill>
-              <a:srgbClr val="365466"/>
-            </a:solidFill>
-          </a:ln>
-        </p:spPr>
-        <p:txBody>
-          <a:bodyPr/>
-          <a:lstStyle/>
-          <a:p/>
+          <a:p>
+            <a:endParaRPr/>
+          </a:p>
         </p:txBody>
       </p:sp>
       <p:cxnSp>
@@ -595,7 +849,9 @@
         <p:txBody>
           <a:bodyPr/>
           <a:lstStyle/>
-          <a:p/>
+          <a:p>
+            <a:endParaRPr/>
+          </a:p>
         </p:txBody>
       </p:sp>
       <p:sp>
@@ -622,7 +878,9 @@
         <p:txBody>
           <a:bodyPr/>
           <a:lstStyle/>
-          <a:p/>
+          <a:p>
+            <a:endParaRPr/>
+          </a:p>
         </p:txBody>
       </p:sp>
       <p:sp>
@@ -649,7 +907,9 @@
         <p:txBody>
           <a:bodyPr/>
           <a:lstStyle/>
-          <a:p/>
+          <a:p>
+            <a:endParaRPr/>
+          </a:p>
         </p:txBody>
       </p:sp>
       <p:cxnSp>
@@ -768,7 +1028,9 @@
         <p:txBody>
           <a:bodyPr/>
           <a:lstStyle/>
-          <a:p/>
+          <a:p>
+            <a:endParaRPr/>
+          </a:p>
         </p:txBody>
       </p:sp>
       <p:sp>
@@ -795,7 +1057,9 @@
         <p:txBody>
           <a:bodyPr/>
           <a:lstStyle/>
-          <a:p/>
+          <a:p>
+            <a:endParaRPr/>
+          </a:p>
         </p:txBody>
       </p:sp>
       <p:sp>
@@ -822,7 +1086,9 @@
         <p:txBody>
           <a:bodyPr/>
           <a:lstStyle/>
-          <a:p/>
+          <a:p>
+            <a:endParaRPr/>
+          </a:p>
         </p:txBody>
       </p:sp>
       <p:sp>
@@ -849,7 +1115,9 @@
         <p:txBody>
           <a:bodyPr/>
           <a:lstStyle/>
-          <a:p/>
+          <a:p>
+            <a:endParaRPr/>
+          </a:p>
         </p:txBody>
       </p:sp>
       <p:sp>
@@ -876,7 +1144,9 @@
         <p:txBody>
           <a:bodyPr/>
           <a:lstStyle/>
-          <a:p/>
+          <a:p>
+            <a:endParaRPr/>
+          </a:p>
         </p:txBody>
       </p:sp>
       <p:sp>
@@ -903,7 +1173,9 @@
         <p:txBody>
           <a:bodyPr/>
           <a:lstStyle/>
-          <a:p/>
+          <a:p>
+            <a:endParaRPr/>
+          </a:p>
         </p:txBody>
       </p:sp>
       <p:sp>
@@ -930,7 +1202,9 @@
         <p:txBody>
           <a:bodyPr/>
           <a:lstStyle/>
-          <a:p/>
+          <a:p>
+            <a:endParaRPr/>
+          </a:p>
         </p:txBody>
       </p:sp>
       <p:sp>
@@ -957,7 +1231,9 @@
         <p:txBody>
           <a:bodyPr/>
           <a:lstStyle/>
-          <a:p/>
+          <a:p>
+            <a:endParaRPr/>
+          </a:p>
         </p:txBody>
       </p:sp>
       <p:sp>
@@ -984,7 +1260,9 @@
         <p:txBody>
           <a:bodyPr/>
           <a:lstStyle/>
-          <a:p/>
+          <a:p>
+            <a:endParaRPr/>
+          </a:p>
         </p:txBody>
       </p:sp>
       <p:sp>
@@ -1011,7 +1289,9 @@
         <p:txBody>
           <a:bodyPr/>
           <a:lstStyle/>
-          <a:p/>
+          <a:p>
+            <a:endParaRPr/>
+          </a:p>
         </p:txBody>
       </p:sp>
       <p:sp>
@@ -1038,7 +1318,9 @@
         <p:txBody>
           <a:bodyPr/>
           <a:lstStyle/>
-          <a:p/>
+          <a:p>
+            <a:endParaRPr/>
+          </a:p>
         </p:txBody>
       </p:sp>
       <p:sp>
@@ -1066,7 +1348,9 @@
         <p:txBody>
           <a:bodyPr/>
           <a:lstStyle/>
-          <a:p/>
+          <a:p>
+            <a:endParaRPr/>
+          </a:p>
         </p:txBody>
       </p:sp>
       <p:cxnSp>
@@ -1164,7 +1448,9 @@
         <p:txBody>
           <a:bodyPr/>
           <a:lstStyle/>
-          <a:p/>
+          <a:p>
+            <a:endParaRPr/>
+          </a:p>
         </p:txBody>
       </p:sp>
       <p:sp>
@@ -1193,7 +1479,9 @@
         <p:txBody>
           <a:bodyPr/>
           <a:lstStyle/>
-          <a:p/>
+          <a:p>
+            <a:endParaRPr/>
+          </a:p>
         </p:txBody>
       </p:sp>
       <p:sp>
@@ -1220,7 +1508,9 @@
         <p:txBody>
           <a:bodyPr/>
           <a:lstStyle/>
-          <a:p/>
+          <a:p>
+            <a:endParaRPr/>
+          </a:p>
         </p:txBody>
       </p:sp>
       <p:sp>
@@ -1247,7 +1537,9 @@
         <p:txBody>
           <a:bodyPr/>
           <a:lstStyle/>
-          <a:p/>
+          <a:p>
+            <a:endParaRPr/>
+          </a:p>
         </p:txBody>
       </p:sp>
       <p:sp>
@@ -1274,7 +1566,9 @@
         <p:txBody>
           <a:bodyPr/>
           <a:lstStyle/>
-          <a:p/>
+          <a:p>
+            <a:endParaRPr/>
+          </a:p>
         </p:txBody>
       </p:sp>
       <p:sp>
@@ -1301,7 +1595,9 @@
         <p:txBody>
           <a:bodyPr/>
           <a:lstStyle/>
-          <a:p/>
+          <a:p>
+            <a:endParaRPr/>
+          </a:p>
         </p:txBody>
       </p:sp>
       <p:sp>
@@ -1328,162 +1624,9 @@
         <p:txBody>
           <a:bodyPr/>
           <a:lstStyle/>
-          <a:p/>
-        </p:txBody>
-      </p:sp>
-      <p:sp>
-        <p:nvSpPr>
-          <p:cNvPr id="50" name="llama-silhouette"/>
-          <p:cNvSpPr/>
-          <p:nvPr/>
-        </p:nvSpPr>
-        <p:spPr>
-          <a:xfrm>
-            <a:off x="2902428" y="1396031"/>
-            <a:ext cx="279206" cy="383908"/>
-          </a:xfrm>
-          <a:custGeom>
-            <a:avLst/>
-            <a:gdLst/>
-            <a:ahLst/>
-            <a:cxnLst/>
-            <a:rect l="l" t="t" r="r" b="b"/>
-            <a:pathLst>
-              <a:path w="21600" h="21600">
-                <a:moveTo>
-                  <a:pt x="0" y="13745"/>
-                </a:moveTo>
-                <a:lnTo>
-                  <a:pt x="4050" y="13745"/>
-                </a:lnTo>
-                <a:lnTo>
-                  <a:pt x="2700" y="1964"/>
-                </a:lnTo>
-                <a:lnTo>
-                  <a:pt x="8100" y="0"/>
-                </a:lnTo>
-                <a:lnTo>
-                  <a:pt x="12150" y="3927"/>
-                </a:lnTo>
-                <a:lnTo>
-                  <a:pt x="13500" y="11782"/>
-                </a:lnTo>
-                <a:lnTo>
-                  <a:pt x="21600" y="13745"/>
-                </a:lnTo>
-                <a:lnTo>
-                  <a:pt x="21600" y="20618"/>
-                </a:lnTo>
-                <a:lnTo>
-                  <a:pt x="8100" y="20618"/>
-                </a:lnTo>
-                <a:lnTo>
-                  <a:pt x="4050" y="18655"/>
-                </a:lnTo>
-                <a:close/>
-              </a:path>
-            </a:pathLst>
-          </a:custGeom>
-          <a:solidFill>
-            <a:srgbClr val="243945"/>
-          </a:solidFill>
-          <a:ln w="11633">
-            <a:solidFill>
-              <a:srgbClr val="243945"/>
-            </a:solidFill>
-          </a:ln>
-        </p:spPr>
-        <p:txBody>
-          <a:bodyPr/>
-          <a:lstStyle/>
-          <a:p/>
-        </p:txBody>
-      </p:sp>
-      <p:sp>
-        <p:nvSpPr>
-          <p:cNvPr id="51" name="index-node-0"/>
-          <p:cNvSpPr/>
-          <p:nvPr/>
-        </p:nvSpPr>
-        <p:spPr>
-          <a:xfrm>
-            <a:off x="3303787" y="1448382"/>
-            <a:ext cx="69802" cy="69802"/>
-          </a:xfrm>
-          <a:prstGeom prst="ellipse">
-            <a:avLst/>
-          </a:prstGeom>
-          <a:solidFill>
-            <a:srgbClr val="DCEFFA"/>
-          </a:solidFill>
-          <a:ln w="11633">
-            <a:solidFill>
-              <a:srgbClr val="365466"/>
-            </a:solidFill>
-          </a:ln>
-        </p:spPr>
-        <p:txBody>
-          <a:bodyPr/>
-          <a:lstStyle/>
-          <a:p/>
-        </p:txBody>
-      </p:sp>
-      <p:sp>
-        <p:nvSpPr>
-          <p:cNvPr id="52" name="index-node-1"/>
-          <p:cNvSpPr/>
-          <p:nvPr/>
-        </p:nvSpPr>
-        <p:spPr>
-          <a:xfrm>
-            <a:off x="3303787" y="1622885"/>
-            <a:ext cx="69802" cy="69802"/>
-          </a:xfrm>
-          <a:prstGeom prst="ellipse">
-            <a:avLst/>
-          </a:prstGeom>
-          <a:solidFill>
-            <a:srgbClr val="DCEFFA"/>
-          </a:solidFill>
-          <a:ln w="11633">
-            <a:solidFill>
-              <a:srgbClr val="365466"/>
-            </a:solidFill>
-          </a:ln>
-        </p:spPr>
-        <p:txBody>
-          <a:bodyPr/>
-          <a:lstStyle/>
-          <a:p/>
-        </p:txBody>
-      </p:sp>
-      <p:sp>
-        <p:nvSpPr>
-          <p:cNvPr id="53" name="index-node-2"/>
-          <p:cNvSpPr/>
-          <p:nvPr/>
-        </p:nvSpPr>
-        <p:spPr>
-          <a:xfrm>
-            <a:off x="3303787" y="1797389"/>
-            <a:ext cx="69802" cy="69802"/>
-          </a:xfrm>
-          <a:prstGeom prst="ellipse">
-            <a:avLst/>
-          </a:prstGeom>
-          <a:solidFill>
-            <a:srgbClr val="DCEFFA"/>
-          </a:solidFill>
-          <a:ln w="11633">
-            <a:solidFill>
-              <a:srgbClr val="365466"/>
-            </a:solidFill>
-          </a:ln>
-        </p:spPr>
-        <p:txBody>
-          <a:bodyPr/>
-          <a:lstStyle/>
-          <a:p/>
+          <a:p>
+            <a:endParaRPr/>
+          </a:p>
         </p:txBody>
       </p:sp>
       <p:sp>
@@ -1512,7 +1655,9 @@
         <p:txBody>
           <a:bodyPr/>
           <a:lstStyle/>
-          <a:p/>
+          <a:p>
+            <a:endParaRPr/>
+          </a:p>
         </p:txBody>
       </p:sp>
       <p:sp>
@@ -1541,7 +1686,9 @@
         <p:txBody>
           <a:bodyPr/>
           <a:lstStyle/>
-          <a:p/>
+          <a:p>
+            <a:endParaRPr/>
+          </a:p>
         </p:txBody>
       </p:sp>
       <p:sp>
@@ -1570,7 +1717,9 @@
         <p:txBody>
           <a:bodyPr/>
           <a:lstStyle/>
-          <a:p/>
+          <a:p>
+            <a:endParaRPr/>
+          </a:p>
         </p:txBody>
       </p:sp>
       <p:sp>
@@ -1601,7 +1750,9 @@
         <p:txBody>
           <a:bodyPr/>
           <a:lstStyle/>
-          <a:p/>
+          <a:p>
+            <a:endParaRPr/>
+          </a:p>
         </p:txBody>
       </p:sp>
       <p:sp>
@@ -1630,7 +1781,9 @@
         <p:txBody>
           <a:bodyPr/>
           <a:lstStyle/>
-          <a:p/>
+          <a:p>
+            <a:endParaRPr/>
+          </a:p>
         </p:txBody>
       </p:sp>
       <p:sp>
@@ -1661,7 +1814,9 @@
         <p:txBody>
           <a:bodyPr/>
           <a:lstStyle/>
-          <a:p/>
+          <a:p>
+            <a:endParaRPr/>
+          </a:p>
         </p:txBody>
       </p:sp>
       <p:sp>
@@ -1690,7 +1845,9 @@
         <p:txBody>
           <a:bodyPr/>
           <a:lstStyle/>
-          <a:p/>
+          <a:p>
+            <a:endParaRPr/>
+          </a:p>
         </p:txBody>
       </p:sp>
       <p:sp>
@@ -1721,7 +1878,9 @@
         <p:txBody>
           <a:bodyPr/>
           <a:lstStyle/>
-          <a:p/>
+          <a:p>
+            <a:endParaRPr/>
+          </a:p>
         </p:txBody>
       </p:sp>
       <p:sp>
@@ -1752,7 +1911,9 @@
         <p:txBody>
           <a:bodyPr/>
           <a:lstStyle/>
-          <a:p/>
+          <a:p>
+            <a:endParaRPr/>
+          </a:p>
         </p:txBody>
       </p:sp>
       <p:sp>
@@ -1781,7 +1942,9 @@
         <p:txBody>
           <a:bodyPr/>
           <a:lstStyle/>
-          <a:p/>
+          <a:p>
+            <a:endParaRPr/>
+          </a:p>
         </p:txBody>
       </p:sp>
       <p:sp>
@@ -1812,7 +1975,9 @@
         <p:txBody>
           <a:bodyPr/>
           <a:lstStyle/>
-          <a:p/>
+          <a:p>
+            <a:endParaRPr/>
+          </a:p>
         </p:txBody>
       </p:sp>
       <p:sp>
@@ -1841,7 +2006,9 @@
         <p:txBody>
           <a:bodyPr/>
           <a:lstStyle/>
-          <a:p/>
+          <a:p>
+            <a:endParaRPr/>
+          </a:p>
         </p:txBody>
       </p:sp>
       <p:sp>
@@ -1870,7 +2037,9 @@
         <p:txBody>
           <a:bodyPr/>
           <a:lstStyle/>
-          <a:p/>
+          <a:p>
+            <a:endParaRPr/>
+          </a:p>
         </p:txBody>
       </p:sp>
       <p:sp>
@@ -1899,7 +2068,9 @@
         <p:txBody>
           <a:bodyPr/>
           <a:lstStyle/>
-          <a:p/>
+          <a:p>
+            <a:endParaRPr/>
+          </a:p>
         </p:txBody>
       </p:sp>
       <p:sp>
@@ -1928,7 +2099,9 @@
         <p:txBody>
           <a:bodyPr/>
           <a:lstStyle/>
-          <a:p/>
+          <a:p>
+            <a:endParaRPr/>
+          </a:p>
         </p:txBody>
       </p:sp>
       <p:sp>
@@ -1957,7 +2130,9 @@
         <p:txBody>
           <a:bodyPr/>
           <a:lstStyle/>
-          <a:p/>
+          <a:p>
+            <a:endParaRPr/>
+          </a:p>
         </p:txBody>
       </p:sp>
       <p:sp>
@@ -1986,7 +2161,9 @@
         <p:txBody>
           <a:bodyPr/>
           <a:lstStyle/>
-          <a:p/>
+          <a:p>
+            <a:endParaRPr/>
+          </a:p>
         </p:txBody>
       </p:sp>
       <p:sp>
@@ -2015,7 +2192,9 @@
         <p:txBody>
           <a:bodyPr/>
           <a:lstStyle/>
-          <a:p/>
+          <a:p>
+            <a:endParaRPr/>
+          </a:p>
         </p:txBody>
       </p:sp>
       <p:sp>
@@ -2044,7 +2223,9 @@
         <p:txBody>
           <a:bodyPr/>
           <a:lstStyle/>
-          <a:p/>
+          <a:p>
+            <a:endParaRPr/>
+          </a:p>
         </p:txBody>
       </p:sp>
       <p:sp>
@@ -2073,7 +2254,9 @@
         <p:txBody>
           <a:bodyPr/>
           <a:lstStyle/>
-          <a:p/>
+          <a:p>
+            <a:endParaRPr/>
+          </a:p>
         </p:txBody>
       </p:sp>
       <p:sp>
@@ -2102,7 +2285,9 @@
         <p:txBody>
           <a:bodyPr/>
           <a:lstStyle/>
-          <a:p/>
+          <a:p>
+            <a:endParaRPr/>
+          </a:p>
         </p:txBody>
       </p:sp>
       <p:sp>
@@ -2131,7 +2316,9 @@
         <p:txBody>
           <a:bodyPr/>
           <a:lstStyle/>
-          <a:p/>
+          <a:p>
+            <a:endParaRPr/>
+          </a:p>
         </p:txBody>
       </p:sp>
       <p:sp>
@@ -2160,7 +2347,9 @@
         <p:txBody>
           <a:bodyPr/>
           <a:lstStyle/>
-          <a:p/>
+          <a:p>
+            <a:endParaRPr/>
+          </a:p>
         </p:txBody>
       </p:sp>
       <p:sp>
@@ -2189,7 +2378,9 @@
         <p:txBody>
           <a:bodyPr/>
           <a:lstStyle/>
-          <a:p/>
+          <a:p>
+            <a:endParaRPr/>
+          </a:p>
         </p:txBody>
       </p:sp>
       <p:sp>
@@ -2218,7 +2409,9 @@
         <p:txBody>
           <a:bodyPr/>
           <a:lstStyle/>
-          <a:p/>
+          <a:p>
+            <a:endParaRPr/>
+          </a:p>
         </p:txBody>
       </p:sp>
       <p:sp>
@@ -2247,7 +2440,9 @@
         <p:txBody>
           <a:bodyPr/>
           <a:lstStyle/>
-          <a:p/>
+          <a:p>
+            <a:endParaRPr/>
+          </a:p>
         </p:txBody>
       </p:sp>
       <p:sp>
@@ -2276,7 +2471,9 @@
         <p:txBody>
           <a:bodyPr/>
           <a:lstStyle/>
-          <a:p/>
+          <a:p>
+            <a:endParaRPr/>
+          </a:p>
         </p:txBody>
       </p:sp>
       <p:sp>
@@ -2305,7 +2502,9 @@
         <p:txBody>
           <a:bodyPr/>
           <a:lstStyle/>
-          <a:p/>
+          <a:p>
+            <a:endParaRPr/>
+          </a:p>
         </p:txBody>
       </p:sp>
       <p:sp>
@@ -2334,7 +2533,9 @@
         <p:txBody>
           <a:bodyPr/>
           <a:lstStyle/>
-          <a:p/>
+          <a:p>
+            <a:endParaRPr/>
+          </a:p>
         </p:txBody>
       </p:sp>
       <p:sp>
@@ -2363,7 +2564,9 @@
         <p:txBody>
           <a:bodyPr/>
           <a:lstStyle/>
-          <a:p/>
+          <a:p>
+            <a:endParaRPr/>
+          </a:p>
         </p:txBody>
       </p:sp>
       <p:sp>
@@ -2394,7 +2597,9 @@
         <p:txBody>
           <a:bodyPr/>
           <a:lstStyle/>
-          <a:p/>
+          <a:p>
+            <a:endParaRPr/>
+          </a:p>
         </p:txBody>
       </p:sp>
       <p:sp>
@@ -2423,7 +2628,9 @@
         <p:txBody>
           <a:bodyPr/>
           <a:lstStyle/>
-          <a:p/>
+          <a:p>
+            <a:endParaRPr/>
+          </a:p>
         </p:txBody>
       </p:sp>
       <p:sp>
@@ -2454,7 +2661,9 @@
         <p:txBody>
           <a:bodyPr/>
           <a:lstStyle/>
-          <a:p/>
+          <a:p>
+            <a:endParaRPr/>
+          </a:p>
         </p:txBody>
       </p:sp>
       <p:sp>
@@ -2483,7 +2692,9 @@
         <p:txBody>
           <a:bodyPr/>
           <a:lstStyle/>
-          <a:p/>
+          <a:p>
+            <a:endParaRPr/>
+          </a:p>
         </p:txBody>
       </p:sp>
       <p:sp>
@@ -2514,7 +2725,9 @@
         <p:txBody>
           <a:bodyPr/>
           <a:lstStyle/>
-          <a:p/>
+          <a:p>
+            <a:endParaRPr/>
+          </a:p>
         </p:txBody>
       </p:sp>
       <p:sp>
@@ -2543,7 +2756,9 @@
         <p:txBody>
           <a:bodyPr/>
           <a:lstStyle/>
-          <a:p/>
+          <a:p>
+            <a:endParaRPr/>
+          </a:p>
         </p:txBody>
       </p:sp>
       <p:sp>
@@ -2572,7 +2787,9 @@
         <p:txBody>
           <a:bodyPr/>
           <a:lstStyle/>
-          <a:p/>
+          <a:p>
+            <a:endParaRPr/>
+          </a:p>
         </p:txBody>
       </p:sp>
       <p:sp>
@@ -2601,7 +2818,9 @@
         <p:txBody>
           <a:bodyPr/>
           <a:lstStyle/>
-          <a:p/>
+          <a:p>
+            <a:endParaRPr/>
+          </a:p>
         </p:txBody>
       </p:sp>
       <p:sp>
@@ -2630,7 +2849,9 @@
         <p:txBody>
           <a:bodyPr/>
           <a:lstStyle/>
-          <a:p/>
+          <a:p>
+            <a:endParaRPr/>
+          </a:p>
         </p:txBody>
       </p:sp>
       <p:sp>
@@ -2659,7 +2880,9 @@
         <p:txBody>
           <a:bodyPr/>
           <a:lstStyle/>
-          <a:p/>
+          <a:p>
+            <a:endParaRPr/>
+          </a:p>
         </p:txBody>
       </p:sp>
       <p:sp>
@@ -2688,7 +2911,9 @@
         <p:txBody>
           <a:bodyPr/>
           <a:lstStyle/>
-          <a:p/>
+          <a:p>
+            <a:endParaRPr/>
+          </a:p>
         </p:txBody>
       </p:sp>
       <p:sp>
@@ -2717,7 +2942,9 @@
         <p:txBody>
           <a:bodyPr/>
           <a:lstStyle/>
-          <a:p/>
+          <a:p>
+            <a:endParaRPr/>
+          </a:p>
         </p:txBody>
       </p:sp>
       <p:sp>
@@ -2746,7 +2973,9 @@
         <p:txBody>
           <a:bodyPr/>
           <a:lstStyle/>
-          <a:p/>
+          <a:p>
+            <a:endParaRPr/>
+          </a:p>
         </p:txBody>
       </p:sp>
       <p:sp>
@@ -2775,7 +3004,9 @@
         <p:txBody>
           <a:bodyPr/>
           <a:lstStyle/>
-          <a:p/>
+          <a:p>
+            <a:endParaRPr/>
+          </a:p>
         </p:txBody>
       </p:sp>
       <p:sp>
@@ -2804,7 +3035,9 @@
         <p:txBody>
           <a:bodyPr/>
           <a:lstStyle/>
-          <a:p/>
+          <a:p>
+            <a:endParaRPr/>
+          </a:p>
         </p:txBody>
       </p:sp>
       <p:sp>
@@ -2833,7 +3066,9 @@
         <p:txBody>
           <a:bodyPr/>
           <a:lstStyle/>
-          <a:p/>
+          <a:p>
+            <a:endParaRPr/>
+          </a:p>
         </p:txBody>
       </p:sp>
       <p:sp>
@@ -2864,7 +3099,9 @@
         <p:txBody>
           <a:bodyPr/>
           <a:lstStyle/>
-          <a:p/>
+          <a:p>
+            <a:endParaRPr/>
+          </a:p>
         </p:txBody>
       </p:sp>
       <p:sp>
@@ -2891,7 +3128,9 @@
         <p:txBody>
           <a:bodyPr/>
           <a:lstStyle/>
-          <a:p/>
+          <a:p>
+            <a:endParaRPr/>
+          </a:p>
         </p:txBody>
       </p:sp>
       <p:sp>
@@ -2918,7 +3157,9 @@
         <p:txBody>
           <a:bodyPr/>
           <a:lstStyle/>
-          <a:p/>
+          <a:p>
+            <a:endParaRPr/>
+          </a:p>
         </p:txBody>
       </p:sp>
       <p:sp>
@@ -2945,7 +3186,9 @@
         <p:txBody>
           <a:bodyPr/>
           <a:lstStyle/>
-          <a:p/>
+          <a:p>
+            <a:endParaRPr/>
+          </a:p>
         </p:txBody>
       </p:sp>
       <p:sp>
@@ -2972,7 +3215,9 @@
         <p:txBody>
           <a:bodyPr/>
           <a:lstStyle/>
-          <a:p/>
+          <a:p>
+            <a:endParaRPr/>
+          </a:p>
         </p:txBody>
       </p:sp>
       <p:sp>
@@ -2999,7 +3244,9 @@
         <p:txBody>
           <a:bodyPr/>
           <a:lstStyle/>
-          <a:p/>
+          <a:p>
+            <a:endParaRPr/>
+          </a:p>
         </p:txBody>
       </p:sp>
       <p:sp>
@@ -3026,7 +3273,9 @@
         <p:txBody>
           <a:bodyPr/>
           <a:lstStyle/>
-          <a:p/>
+          <a:p>
+            <a:endParaRPr/>
+          </a:p>
         </p:txBody>
       </p:sp>
       <p:sp>
@@ -3053,7 +3302,9 @@
         <p:txBody>
           <a:bodyPr/>
           <a:lstStyle/>
-          <a:p/>
+          <a:p>
+            <a:endParaRPr/>
+          </a:p>
         </p:txBody>
       </p:sp>
       <p:sp>
@@ -3082,7 +3333,9 @@
         <p:txBody>
           <a:bodyPr/>
           <a:lstStyle/>
-          <a:p/>
+          <a:p>
+            <a:endParaRPr/>
+          </a:p>
         </p:txBody>
       </p:sp>
       <p:sp>
@@ -3109,7 +3362,9 @@
         <p:txBody>
           <a:bodyPr/>
           <a:lstStyle/>
-          <a:p/>
+          <a:p>
+            <a:endParaRPr/>
+          </a:p>
         </p:txBody>
       </p:sp>
       <p:sp>
@@ -3136,7 +3391,9 @@
         <p:txBody>
           <a:bodyPr/>
           <a:lstStyle/>
-          <a:p/>
+          <a:p>
+            <a:endParaRPr/>
+          </a:p>
         </p:txBody>
       </p:sp>
       <p:sp>
@@ -3163,7 +3420,9 @@
         <p:txBody>
           <a:bodyPr/>
           <a:lstStyle/>
-          <a:p/>
+          <a:p>
+            <a:endParaRPr/>
+          </a:p>
         </p:txBody>
       </p:sp>
       <p:sp>
@@ -3190,7 +3449,9 @@
         <p:txBody>
           <a:bodyPr/>
           <a:lstStyle/>
-          <a:p/>
+          <a:p>
+            <a:endParaRPr/>
+          </a:p>
         </p:txBody>
       </p:sp>
       <p:sp>
@@ -3217,7 +3478,9 @@
         <p:txBody>
           <a:bodyPr/>
           <a:lstStyle/>
-          <a:p/>
+          <a:p>
+            <a:endParaRPr/>
+          </a:p>
         </p:txBody>
       </p:sp>
       <p:sp>
@@ -3244,7 +3507,9 @@
         <p:txBody>
           <a:bodyPr/>
           <a:lstStyle/>
-          <a:p/>
+          <a:p>
+            <a:endParaRPr/>
+          </a:p>
         </p:txBody>
       </p:sp>
       <p:sp>
@@ -3271,7 +3536,9 @@
         <p:txBody>
           <a:bodyPr/>
           <a:lstStyle/>
-          <a:p/>
+          <a:p>
+            <a:endParaRPr/>
+          </a:p>
         </p:txBody>
       </p:sp>
       <p:sp>
@@ -3298,7 +3565,9 @@
         <p:txBody>
           <a:bodyPr/>
           <a:lstStyle/>
-          <a:p/>
+          <a:p>
+            <a:endParaRPr/>
+          </a:p>
         </p:txBody>
       </p:sp>
       <p:sp>
@@ -3325,7 +3594,9 @@
         <p:txBody>
           <a:bodyPr/>
           <a:lstStyle/>
-          <a:p/>
+          <a:p>
+            <a:endParaRPr/>
+          </a:p>
         </p:txBody>
       </p:sp>
       <p:sp>
@@ -3352,7 +3623,9 @@
         <p:txBody>
           <a:bodyPr/>
           <a:lstStyle/>
-          <a:p/>
+          <a:p>
+            <a:endParaRPr/>
+          </a:p>
         </p:txBody>
       </p:sp>
       <p:sp>
@@ -3381,7 +3654,9 @@
         <p:txBody>
           <a:bodyPr/>
           <a:lstStyle/>
-          <a:p/>
+          <a:p>
+            <a:endParaRPr/>
+          </a:p>
         </p:txBody>
       </p:sp>
       <p:sp>
@@ -3410,7 +3685,9 @@
         <p:txBody>
           <a:bodyPr/>
           <a:lstStyle/>
-          <a:p/>
+          <a:p>
+            <a:endParaRPr/>
+          </a:p>
         </p:txBody>
       </p:sp>
       <p:sp>
@@ -3441,7 +3718,9 @@
         <p:txBody>
           <a:bodyPr/>
           <a:lstStyle/>
-          <a:p/>
+          <a:p>
+            <a:endParaRPr/>
+          </a:p>
         </p:txBody>
       </p:sp>
       <p:sp>
@@ -3472,7 +3751,9 @@
         <p:txBody>
           <a:bodyPr/>
           <a:lstStyle/>
-          <a:p/>
+          <a:p>
+            <a:endParaRPr/>
+          </a:p>
         </p:txBody>
       </p:sp>
       <p:sp>
@@ -3501,7 +3782,9 @@
         <p:txBody>
           <a:bodyPr/>
           <a:lstStyle/>
-          <a:p/>
+          <a:p>
+            <a:endParaRPr/>
+          </a:p>
         </p:txBody>
       </p:sp>
       <p:sp>
@@ -3530,7 +3813,9 @@
         <p:txBody>
           <a:bodyPr/>
           <a:lstStyle/>
-          <a:p/>
+          <a:p>
+            <a:endParaRPr/>
+          </a:p>
         </p:txBody>
       </p:sp>
       <p:sp>
@@ -3559,7 +3844,9 @@
         <p:txBody>
           <a:bodyPr/>
           <a:lstStyle/>
-          <a:p/>
+          <a:p>
+            <a:endParaRPr/>
+          </a:p>
         </p:txBody>
       </p:sp>
       <p:sp>
@@ -3586,7 +3873,9 @@
         <p:txBody>
           <a:bodyPr/>
           <a:lstStyle/>
-          <a:p/>
+          <a:p>
+            <a:endParaRPr/>
+          </a:p>
         </p:txBody>
       </p:sp>
       <p:sp>
@@ -3613,7 +3902,9 @@
         <p:txBody>
           <a:bodyPr/>
           <a:lstStyle/>
-          <a:p/>
+          <a:p>
+            <a:endParaRPr/>
+          </a:p>
         </p:txBody>
       </p:sp>
       <p:sp>
@@ -3640,7 +3931,9 @@
         <p:txBody>
           <a:bodyPr/>
           <a:lstStyle/>
-          <a:p/>
+          <a:p>
+            <a:endParaRPr/>
+          </a:p>
         </p:txBody>
       </p:sp>
       <p:sp>
@@ -3667,7 +3960,9 @@
         <p:txBody>
           <a:bodyPr/>
           <a:lstStyle/>
-          <a:p/>
+          <a:p>
+            <a:endParaRPr/>
+          </a:p>
         </p:txBody>
       </p:sp>
       <p:sp>
@@ -3694,7 +3989,9 @@
         <p:txBody>
           <a:bodyPr/>
           <a:lstStyle/>
-          <a:p/>
+          <a:p>
+            <a:endParaRPr/>
+          </a:p>
         </p:txBody>
       </p:sp>
       <p:sp>
@@ -3721,7 +4018,9 @@
         <p:txBody>
           <a:bodyPr/>
           <a:lstStyle/>
-          <a:p/>
+          <a:p>
+            <a:endParaRPr/>
+          </a:p>
         </p:txBody>
       </p:sp>
       <p:sp>
@@ -3750,7 +4049,9 @@
         <p:txBody>
           <a:bodyPr/>
           <a:lstStyle/>
-          <a:p/>
+          <a:p>
+            <a:endParaRPr/>
+          </a:p>
         </p:txBody>
       </p:sp>
       <p:sp>
@@ -3779,7 +4080,9 @@
         <p:txBody>
           <a:bodyPr/>
           <a:lstStyle/>
-          <a:p/>
+          <a:p>
+            <a:endParaRPr/>
+          </a:p>
         </p:txBody>
       </p:sp>
       <p:sp>
@@ -3808,7 +4111,9 @@
         <p:txBody>
           <a:bodyPr/>
           <a:lstStyle/>
-          <a:p/>
+          <a:p>
+            <a:endParaRPr/>
+          </a:p>
         </p:txBody>
       </p:sp>
       <p:sp>
@@ -3837,7 +4142,9 @@
         <p:txBody>
           <a:bodyPr/>
           <a:lstStyle/>
-          <a:p/>
+          <a:p>
+            <a:endParaRPr/>
+          </a:p>
         </p:txBody>
       </p:sp>
       <p:sp>
@@ -3866,7 +4173,9 @@
         <p:txBody>
           <a:bodyPr/>
           <a:lstStyle/>
-          <a:p/>
+          <a:p>
+            <a:endParaRPr/>
+          </a:p>
         </p:txBody>
       </p:sp>
       <p:sp>
@@ -3889,14 +4198,14 @@
           </a:ln>
         </p:spPr>
         <p:txBody>
-          <a:bodyPr wrap="none" anchor="ctr" lIns="0" tIns="0" rIns="0" bIns="0">
+          <a:bodyPr wrap="none" lIns="0" tIns="0" rIns="0" bIns="0" anchor="ctr">
             <a:noAutofit/>
           </a:bodyPr>
           <a:lstStyle/>
           <a:p>
             <a:pPr algn="ctr"/>
             <a:r>
-              <a:rPr lang="zh-CN" sz="1484" b="1">
+              <a:rPr lang="zh-CN" sz="1000" b="1" dirty="0">
                 <a:solidFill>
                   <a:srgbClr val="142A38"/>
                 </a:solidFill>
@@ -3906,7 +4215,7 @@
               </a:rPr>
               <a:t>Foundation Layer</a:t>
             </a:r>
-            <a:endParaRPr lang="zh-CN" sz="1484"/>
+            <a:endParaRPr lang="zh-CN" sz="1000" dirty="0"/>
           </a:p>
         </p:txBody>
       </p:sp>
@@ -3930,14 +4239,14 @@
           </a:ln>
         </p:spPr>
         <p:txBody>
-          <a:bodyPr wrap="none" anchor="ctr" lIns="0" tIns="0" rIns="0" bIns="0">
+          <a:bodyPr wrap="none" lIns="0" tIns="0" rIns="0" bIns="0" anchor="ctr">
             <a:noAutofit/>
           </a:bodyPr>
           <a:lstStyle/>
           <a:p>
             <a:pPr algn="ctr"/>
             <a:r>
-              <a:rPr lang="zh-CN" sz="1466">
+              <a:rPr lang="zh-CN" sz="1050" dirty="0">
                 <a:solidFill>
                   <a:srgbClr val="142A38"/>
                 </a:solidFill>
@@ -3947,12 +4256,12 @@
               </a:rPr>
               <a:t>Model &amp; Retrieval</a:t>
             </a:r>
-            <a:endParaRPr lang="zh-CN" sz="1466"/>
+            <a:endParaRPr lang="zh-CN" sz="1050" dirty="0"/>
           </a:p>
           <a:p>
             <a:pPr algn="ctr"/>
             <a:r>
-              <a:rPr lang="zh-CN" sz="1466">
+              <a:rPr lang="zh-CN" sz="1050" dirty="0">
                 <a:solidFill>
                   <a:srgbClr val="142A38"/>
                 </a:solidFill>
@@ -3962,7 +4271,7 @@
               </a:rPr>
               <a:t>Components</a:t>
             </a:r>
-            <a:endParaRPr lang="zh-CN" sz="1466"/>
+            <a:endParaRPr lang="zh-CN" sz="1050" dirty="0"/>
           </a:p>
         </p:txBody>
       </p:sp>
@@ -3986,14 +4295,14 @@
           </a:ln>
         </p:spPr>
         <p:txBody>
-          <a:bodyPr wrap="none" anchor="ctr" lIns="0" tIns="0" rIns="0" bIns="0">
+          <a:bodyPr wrap="none" lIns="0" tIns="0" rIns="0" bIns="0" anchor="ctr">
             <a:noAutofit/>
           </a:bodyPr>
           <a:lstStyle/>
           <a:p>
             <a:pPr algn="ctr"/>
             <a:r>
-              <a:rPr lang="zh-CN" sz="1392" b="1">
+              <a:rPr lang="zh-CN" sz="1392" b="1" dirty="0">
                 <a:solidFill>
                   <a:srgbClr val="142A38"/>
                 </a:solidFill>
@@ -4003,7 +4312,7 @@
               </a:rPr>
               <a:t>&lt;/&gt;</a:t>
             </a:r>
-            <a:endParaRPr lang="zh-CN" sz="1392"/>
+            <a:endParaRPr lang="zh-CN" sz="1392" dirty="0"/>
           </a:p>
         </p:txBody>
       </p:sp>
@@ -4027,14 +4336,14 @@
           </a:ln>
         </p:spPr>
         <p:txBody>
-          <a:bodyPr wrap="none" anchor="ctr" lIns="0" tIns="0" rIns="0" bIns="0">
+          <a:bodyPr wrap="none" lIns="0" tIns="0" rIns="0" bIns="0" anchor="ctr">
             <a:noAutofit/>
           </a:bodyPr>
           <a:lstStyle/>
           <a:p>
             <a:pPr algn="ctr"/>
             <a:r>
-              <a:rPr lang="zh-CN" sz="1282">
+              <a:rPr lang="zh-CN" sz="800" dirty="0">
                 <a:solidFill>
                   <a:srgbClr val="142A38"/>
                 </a:solidFill>
@@ -4044,7 +4353,7 @@
               </a:rPr>
               <a:t>LangChain</a:t>
             </a:r>
-            <a:endParaRPr lang="zh-CN" sz="1282"/>
+            <a:endParaRPr lang="zh-CN" sz="800" dirty="0"/>
           </a:p>
         </p:txBody>
       </p:sp>
@@ -4068,14 +4377,14 @@
           </a:ln>
         </p:spPr>
         <p:txBody>
-          <a:bodyPr wrap="none" anchor="ctr" lIns="0" tIns="0" rIns="0" bIns="0">
+          <a:bodyPr wrap="none" lIns="0" tIns="0" rIns="0" bIns="0" anchor="ctr">
             <a:noAutofit/>
           </a:bodyPr>
           <a:lstStyle/>
           <a:p>
             <a:pPr algn="ctr"/>
             <a:r>
-              <a:rPr lang="zh-CN" sz="1282">
+              <a:rPr lang="zh-CN" sz="800" dirty="0">
                 <a:solidFill>
                   <a:srgbClr val="142A38"/>
                 </a:solidFill>
@@ -4085,7 +4394,7 @@
               </a:rPr>
               <a:t>LlamaIndex</a:t>
             </a:r>
-            <a:endParaRPr lang="zh-CN" sz="1282"/>
+            <a:endParaRPr lang="zh-CN" sz="800" dirty="0"/>
           </a:p>
         </p:txBody>
       </p:sp>
@@ -4097,7 +4406,7 @@
         </p:nvSpPr>
         <p:spPr>
           <a:xfrm>
-            <a:off x="4123954" y="1587985"/>
+            <a:off x="3928511" y="1660778"/>
             <a:ext cx="1396031" cy="488611"/>
           </a:xfrm>
           <a:prstGeom prst="rect">
@@ -4109,14 +4418,14 @@
           </a:ln>
         </p:spPr>
         <p:txBody>
-          <a:bodyPr wrap="none" anchor="ctr" lIns="0" tIns="0" rIns="0" bIns="0">
+          <a:bodyPr wrap="none" lIns="0" tIns="0" rIns="0" bIns="0" anchor="ctr">
             <a:noAutofit/>
           </a:bodyPr>
           <a:lstStyle/>
           <a:p>
             <a:pPr algn="ctr"/>
             <a:r>
-              <a:rPr lang="zh-CN" sz="1648">
+              <a:rPr lang="zh-CN" sz="1000" dirty="0">
                 <a:solidFill>
                   <a:srgbClr val="142A38"/>
                 </a:solidFill>
@@ -4126,12 +4435,12 @@
               </a:rPr>
               <a:t>Model</a:t>
             </a:r>
-            <a:endParaRPr lang="zh-CN" sz="1648"/>
+            <a:endParaRPr lang="zh-CN" sz="1000" dirty="0"/>
           </a:p>
           <a:p>
             <a:pPr algn="ctr"/>
             <a:r>
-              <a:rPr lang="zh-CN" sz="1648">
+              <a:rPr lang="zh-CN" sz="1000" dirty="0">
                 <a:solidFill>
                   <a:srgbClr val="142A38"/>
                 </a:solidFill>
@@ -4141,7 +4450,7 @@
               </a:rPr>
               <a:t>Interfaces</a:t>
             </a:r>
-            <a:endParaRPr lang="zh-CN" sz="1648"/>
+            <a:endParaRPr lang="zh-CN" sz="1000" dirty="0"/>
           </a:p>
         </p:txBody>
       </p:sp>
@@ -4165,14 +4474,14 @@
           </a:ln>
         </p:spPr>
         <p:txBody>
-          <a:bodyPr wrap="none" anchor="ctr" lIns="0" tIns="0" rIns="0" bIns="0">
+          <a:bodyPr wrap="none" lIns="0" tIns="0" rIns="0" bIns="0" anchor="ctr">
             <a:noAutofit/>
           </a:bodyPr>
           <a:lstStyle/>
           <a:p>
             <a:pPr algn="ctr"/>
             <a:r>
-              <a:rPr lang="zh-CN" sz="1612">
+              <a:rPr lang="zh-CN" sz="1000" dirty="0">
                 <a:solidFill>
                   <a:srgbClr val="142A38"/>
                 </a:solidFill>
@@ -4182,12 +4491,12 @@
               </a:rPr>
               <a:t>Retrieval</a:t>
             </a:r>
-            <a:endParaRPr lang="zh-CN" sz="1612"/>
+            <a:endParaRPr lang="zh-CN" sz="1000" dirty="0"/>
           </a:p>
           <a:p>
             <a:pPr algn="ctr"/>
             <a:r>
-              <a:rPr lang="zh-CN" sz="1612">
+              <a:rPr lang="zh-CN" sz="1000" dirty="0">
                 <a:solidFill>
                   <a:srgbClr val="142A38"/>
                 </a:solidFill>
@@ -4197,7 +4506,7 @@
               </a:rPr>
               <a:t>Components</a:t>
             </a:r>
-            <a:endParaRPr lang="zh-CN" sz="1612"/>
+            <a:endParaRPr lang="zh-CN" sz="1000" dirty="0"/>
           </a:p>
         </p:txBody>
       </p:sp>
@@ -4221,14 +4530,14 @@
           </a:ln>
         </p:spPr>
         <p:txBody>
-          <a:bodyPr wrap="none" anchor="ctr" lIns="0" tIns="0" rIns="0" bIns="0">
+          <a:bodyPr wrap="none" lIns="0" tIns="0" rIns="0" bIns="0" anchor="ctr">
             <a:noAutofit/>
           </a:bodyPr>
           <a:lstStyle/>
           <a:p>
             <a:pPr algn="ctr"/>
             <a:r>
-              <a:rPr lang="zh-CN" sz="1484" b="1">
+              <a:rPr lang="zh-CN" sz="1000" b="1" dirty="0">
                 <a:solidFill>
                   <a:srgbClr val="142A38"/>
                 </a:solidFill>
@@ -4238,7 +4547,7 @@
               </a:rPr>
               <a:t>Orchestration Layer</a:t>
             </a:r>
-            <a:endParaRPr lang="zh-CN" sz="1484"/>
+            <a:endParaRPr lang="zh-CN" sz="1000" dirty="0"/>
           </a:p>
         </p:txBody>
       </p:sp>
@@ -4262,14 +4571,14 @@
           </a:ln>
         </p:spPr>
         <p:txBody>
-          <a:bodyPr wrap="none" anchor="ctr" lIns="0" tIns="0" rIns="0" bIns="0">
+          <a:bodyPr wrap="none" lIns="0" tIns="0" rIns="0" bIns="0" anchor="ctr">
             <a:noAutofit/>
           </a:bodyPr>
           <a:lstStyle/>
           <a:p>
             <a:pPr algn="ctr"/>
             <a:r>
-              <a:rPr lang="zh-CN" sz="1466">
+              <a:rPr lang="zh-CN" sz="1050" dirty="0">
                 <a:solidFill>
                   <a:srgbClr val="142A38"/>
                 </a:solidFill>
@@ -4279,7 +4588,7 @@
               </a:rPr>
               <a:t>Multi-Agent Frameworks</a:t>
             </a:r>
-            <a:endParaRPr lang="zh-CN" sz="1466"/>
+            <a:endParaRPr lang="zh-CN" sz="1050" dirty="0"/>
           </a:p>
         </p:txBody>
       </p:sp>
@@ -4303,14 +4612,14 @@
           </a:ln>
         </p:spPr>
         <p:txBody>
-          <a:bodyPr wrap="none" anchor="ctr" lIns="0" tIns="0" rIns="0" bIns="0">
+          <a:bodyPr wrap="none" lIns="0" tIns="0" rIns="0" bIns="0" anchor="ctr">
             <a:noAutofit/>
           </a:bodyPr>
           <a:lstStyle/>
           <a:p>
             <a:pPr algn="ctr"/>
             <a:r>
-              <a:rPr lang="zh-CN" sz="1282">
+              <a:rPr lang="zh-CN" sz="800" dirty="0">
                 <a:solidFill>
                   <a:srgbClr val="142A38"/>
                 </a:solidFill>
@@ -4320,7 +4629,7 @@
               </a:rPr>
               <a:t>AutoGen</a:t>
             </a:r>
-            <a:endParaRPr lang="zh-CN" sz="1282"/>
+            <a:endParaRPr lang="zh-CN" sz="800" dirty="0"/>
           </a:p>
         </p:txBody>
       </p:sp>
@@ -4344,14 +4653,14 @@
           </a:ln>
         </p:spPr>
         <p:txBody>
-          <a:bodyPr wrap="none" anchor="ctr" lIns="0" tIns="0" rIns="0" bIns="0">
+          <a:bodyPr wrap="none" lIns="0" tIns="0" rIns="0" bIns="0" anchor="ctr">
             <a:noAutofit/>
           </a:bodyPr>
           <a:lstStyle/>
           <a:p>
             <a:pPr algn="ctr"/>
             <a:r>
-              <a:rPr lang="zh-CN" sz="1282">
+              <a:rPr lang="zh-CN" sz="800" dirty="0">
                 <a:solidFill>
                   <a:srgbClr val="142A38"/>
                 </a:solidFill>
@@ -4361,7 +4670,7 @@
               </a:rPr>
               <a:t>CrewAI</a:t>
             </a:r>
-            <a:endParaRPr lang="zh-CN" sz="1282"/>
+            <a:endParaRPr lang="zh-CN" sz="800" dirty="0"/>
           </a:p>
         </p:txBody>
       </p:sp>
@@ -4385,14 +4694,14 @@
           </a:ln>
         </p:spPr>
         <p:txBody>
-          <a:bodyPr wrap="none" anchor="ctr" lIns="0" tIns="0" rIns="0" bIns="0">
+          <a:bodyPr wrap="none" lIns="0" tIns="0" rIns="0" bIns="0" anchor="ctr">
             <a:noAutofit/>
           </a:bodyPr>
           <a:lstStyle/>
           <a:p>
             <a:pPr algn="ctr"/>
             <a:r>
-              <a:rPr lang="zh-CN" sz="1282">
+              <a:rPr lang="zh-CN" sz="800" dirty="0">
                 <a:solidFill>
                   <a:srgbClr val="142A38"/>
                 </a:solidFill>
@@ -4402,7 +4711,7 @@
               </a:rPr>
               <a:t>MetaGPT</a:t>
             </a:r>
-            <a:endParaRPr lang="zh-CN" sz="1282"/>
+            <a:endParaRPr lang="zh-CN" sz="800" dirty="0"/>
           </a:p>
         </p:txBody>
       </p:sp>
@@ -4426,14 +4735,14 @@
           </a:ln>
         </p:spPr>
         <p:txBody>
-          <a:bodyPr wrap="none" anchor="ctr" lIns="0" tIns="0" rIns="0" bIns="0">
+          <a:bodyPr wrap="none" lIns="0" tIns="0" rIns="0" bIns="0" anchor="ctr">
             <a:noAutofit/>
           </a:bodyPr>
           <a:lstStyle/>
           <a:p>
             <a:pPr algn="ctr"/>
             <a:r>
-              <a:rPr lang="zh-CN" sz="1648">
+              <a:rPr lang="zh-CN" sz="1000" dirty="0">
                 <a:solidFill>
                   <a:srgbClr val="142A38"/>
                 </a:solidFill>
@@ -4443,12 +4752,12 @@
               </a:rPr>
               <a:t>Role</a:t>
             </a:r>
-            <a:endParaRPr lang="zh-CN" sz="1648"/>
+            <a:endParaRPr lang="zh-CN" sz="1000" dirty="0"/>
           </a:p>
           <a:p>
             <a:pPr algn="ctr"/>
             <a:r>
-              <a:rPr lang="zh-CN" sz="1648">
+              <a:rPr lang="zh-CN" sz="1000" dirty="0">
                 <a:solidFill>
                   <a:srgbClr val="142A38"/>
                 </a:solidFill>
@@ -4458,7 +4767,7 @@
               </a:rPr>
               <a:t>Definition</a:t>
             </a:r>
-            <a:endParaRPr lang="zh-CN" sz="1648"/>
+            <a:endParaRPr lang="zh-CN" sz="1000" dirty="0"/>
           </a:p>
         </p:txBody>
       </p:sp>
@@ -4482,14 +4791,14 @@
           </a:ln>
         </p:spPr>
         <p:txBody>
-          <a:bodyPr wrap="none" anchor="ctr" lIns="0" tIns="0" rIns="0" bIns="0">
+          <a:bodyPr wrap="none" lIns="0" tIns="0" rIns="0" bIns="0" anchor="ctr">
             <a:noAutofit/>
           </a:bodyPr>
           <a:lstStyle/>
           <a:p>
             <a:pPr algn="ctr"/>
             <a:r>
-              <a:rPr lang="zh-CN" sz="1612">
+              <a:rPr lang="zh-CN" sz="1000" dirty="0">
                 <a:solidFill>
                   <a:srgbClr val="142A38"/>
                 </a:solidFill>
@@ -4499,12 +4808,12 @@
               </a:rPr>
               <a:t>Workflow</a:t>
             </a:r>
-            <a:endParaRPr lang="zh-CN" sz="1612"/>
+            <a:endParaRPr lang="zh-CN" sz="1000" dirty="0"/>
           </a:p>
           <a:p>
             <a:pPr algn="ctr"/>
             <a:r>
-              <a:rPr lang="zh-CN" sz="1612">
+              <a:rPr lang="zh-CN" sz="1000" dirty="0">
                 <a:solidFill>
                   <a:srgbClr val="142A38"/>
                 </a:solidFill>
@@ -4514,7 +4823,7 @@
               </a:rPr>
               <a:t>Control</a:t>
             </a:r>
-            <a:endParaRPr lang="zh-CN" sz="1612"/>
+            <a:endParaRPr lang="zh-CN" sz="1000" dirty="0"/>
           </a:p>
         </p:txBody>
       </p:sp>
@@ -4538,14 +4847,14 @@
           </a:ln>
         </p:spPr>
         <p:txBody>
-          <a:bodyPr wrap="none" anchor="ctr" lIns="0" tIns="0" rIns="0" bIns="0">
+          <a:bodyPr wrap="none" lIns="0" tIns="0" rIns="0" bIns="0" anchor="ctr">
             <a:noAutofit/>
           </a:bodyPr>
           <a:lstStyle/>
           <a:p>
             <a:pPr algn="ctr"/>
             <a:r>
-              <a:rPr lang="zh-CN" sz="1484" b="1">
+              <a:rPr lang="zh-CN" sz="1000" b="1" dirty="0">
                 <a:solidFill>
                   <a:srgbClr val="142A38"/>
                 </a:solidFill>
@@ -4555,12 +4864,12 @@
               </a:rPr>
               <a:t>Application</a:t>
             </a:r>
-            <a:endParaRPr lang="zh-CN" sz="1484"/>
+            <a:endParaRPr lang="zh-CN" sz="1000" dirty="0"/>
           </a:p>
           <a:p>
             <a:pPr algn="ctr"/>
             <a:r>
-              <a:rPr lang="zh-CN" sz="1484" b="1">
+              <a:rPr lang="zh-CN" sz="1000" b="1" dirty="0">
                 <a:solidFill>
                   <a:srgbClr val="142A38"/>
                 </a:solidFill>
@@ -4570,7 +4879,7 @@
               </a:rPr>
               <a:t>Resource Layer</a:t>
             </a:r>
-            <a:endParaRPr lang="zh-CN" sz="1484"/>
+            <a:endParaRPr lang="zh-CN" sz="1000" dirty="0"/>
           </a:p>
         </p:txBody>
       </p:sp>
@@ -4594,14 +4903,14 @@
           </a:ln>
         </p:spPr>
         <p:txBody>
-          <a:bodyPr wrap="none" anchor="ctr" lIns="0" tIns="0" rIns="0" bIns="0">
+          <a:bodyPr wrap="none" lIns="0" tIns="0" rIns="0" bIns="0" anchor="ctr">
             <a:noAutofit/>
           </a:bodyPr>
           <a:lstStyle/>
           <a:p>
             <a:pPr algn="ctr"/>
             <a:r>
-              <a:rPr lang="zh-CN" sz="1466">
+              <a:rPr lang="zh-CN" sz="1050" dirty="0">
                 <a:solidFill>
                   <a:srgbClr val="142A38"/>
                 </a:solidFill>
@@ -4611,7 +4920,7 @@
               </a:rPr>
               <a:t>Representative Platforms</a:t>
             </a:r>
-            <a:endParaRPr lang="zh-CN" sz="1466"/>
+            <a:endParaRPr lang="zh-CN" sz="1050" dirty="0"/>
           </a:p>
         </p:txBody>
       </p:sp>
@@ -4635,14 +4944,14 @@
           </a:ln>
         </p:spPr>
         <p:txBody>
-          <a:bodyPr wrap="none" anchor="ctr" lIns="0" tIns="0" rIns="0" bIns="0">
+          <a:bodyPr wrap="none" lIns="0" tIns="0" rIns="0" bIns="0" anchor="ctr">
             <a:noAutofit/>
           </a:bodyPr>
           <a:lstStyle/>
           <a:p>
             <a:pPr algn="ctr"/>
             <a:r>
-              <a:rPr lang="zh-CN" sz="1282">
+              <a:rPr lang="zh-CN" sz="800" dirty="0">
                 <a:solidFill>
                   <a:srgbClr val="142A38"/>
                 </a:solidFill>
@@ -4652,7 +4961,7 @@
               </a:rPr>
               <a:t>STORM</a:t>
             </a:r>
-            <a:endParaRPr lang="zh-CN" sz="1282"/>
+            <a:endParaRPr lang="zh-CN" sz="800" dirty="0"/>
           </a:p>
         </p:txBody>
       </p:sp>
@@ -4676,14 +4985,14 @@
           </a:ln>
         </p:spPr>
         <p:txBody>
-          <a:bodyPr wrap="none" anchor="ctr" lIns="0" tIns="0" rIns="0" bIns="0">
+          <a:bodyPr wrap="none" lIns="0" tIns="0" rIns="0" bIns="0" anchor="ctr">
             <a:noAutofit/>
           </a:bodyPr>
           <a:lstStyle/>
           <a:p>
             <a:pPr algn="ctr"/>
             <a:r>
-              <a:rPr lang="zh-CN" sz="1282">
+              <a:rPr lang="zh-CN" sz="800" dirty="0">
                 <a:solidFill>
                   <a:srgbClr val="142A38"/>
                 </a:solidFill>
@@ -4693,7 +5002,7 @@
               </a:rPr>
               <a:t>Co-STORM</a:t>
             </a:r>
-            <a:endParaRPr lang="zh-CN" sz="1282"/>
+            <a:endParaRPr lang="zh-CN" sz="800" dirty="0"/>
           </a:p>
         </p:txBody>
       </p:sp>
@@ -4717,14 +5026,14 @@
           </a:ln>
         </p:spPr>
         <p:txBody>
-          <a:bodyPr wrap="none" anchor="ctr" lIns="0" tIns="0" rIns="0" bIns="0">
+          <a:bodyPr wrap="none" lIns="0" tIns="0" rIns="0" bIns="0" anchor="ctr">
             <a:noAutofit/>
           </a:bodyPr>
           <a:lstStyle/>
           <a:p>
             <a:pPr algn="ctr"/>
             <a:r>
-              <a:rPr lang="zh-CN" sz="1282">
+              <a:rPr lang="zh-CN" sz="800" dirty="0">
                 <a:solidFill>
                   <a:srgbClr val="142A38"/>
                 </a:solidFill>
@@ -4734,7 +5043,7 @@
               </a:rPr>
               <a:t>RAGFlow</a:t>
             </a:r>
-            <a:endParaRPr lang="zh-CN" sz="1282"/>
+            <a:endParaRPr lang="zh-CN" sz="800" dirty="0"/>
           </a:p>
         </p:txBody>
       </p:sp>
@@ -4758,14 +5067,14 @@
           </a:ln>
         </p:spPr>
         <p:txBody>
-          <a:bodyPr wrap="none" anchor="ctr" lIns="0" tIns="0" rIns="0" bIns="0">
+          <a:bodyPr wrap="none" lIns="0" tIns="0" rIns="0" bIns="0" anchor="ctr">
             <a:noAutofit/>
           </a:bodyPr>
           <a:lstStyle/>
           <a:p>
             <a:pPr algn="ctr"/>
             <a:r>
-              <a:rPr lang="zh-CN" sz="1557">
+              <a:rPr lang="zh-CN" sz="1000" dirty="0">
                 <a:solidFill>
                   <a:srgbClr val="142A38"/>
                 </a:solidFill>
@@ -4775,12 +5084,12 @@
               </a:rPr>
               <a:t>Retrieval-Grounded</a:t>
             </a:r>
-            <a:endParaRPr lang="zh-CN" sz="1557"/>
+            <a:endParaRPr lang="zh-CN" sz="1000" dirty="0"/>
           </a:p>
           <a:p>
             <a:pPr algn="ctr"/>
             <a:r>
-              <a:rPr lang="zh-CN" sz="1557">
+              <a:rPr lang="zh-CN" sz="1000" dirty="0">
                 <a:solidFill>
                   <a:srgbClr val="142A38"/>
                 </a:solidFill>
@@ -4790,7 +5099,7 @@
               </a:rPr>
               <a:t>Synthesis</a:t>
             </a:r>
-            <a:endParaRPr lang="zh-CN" sz="1557"/>
+            <a:endParaRPr lang="zh-CN" sz="1000" dirty="0"/>
           </a:p>
         </p:txBody>
       </p:sp>
@@ -4814,14 +5123,14 @@
           </a:ln>
         </p:spPr>
         <p:txBody>
-          <a:bodyPr wrap="none" anchor="ctr" lIns="0" tIns="0" rIns="0" bIns="0">
+          <a:bodyPr wrap="none" lIns="0" tIns="0" rIns="0" bIns="0" anchor="ctr">
             <a:noAutofit/>
           </a:bodyPr>
           <a:lstStyle/>
           <a:p>
             <a:pPr algn="ctr"/>
             <a:r>
-              <a:rPr lang="zh-CN" sz="1612">
+              <a:rPr lang="zh-CN" sz="1000" dirty="0">
                 <a:solidFill>
                   <a:srgbClr val="142A38"/>
                 </a:solidFill>
@@ -4831,12 +5140,12 @@
               </a:rPr>
               <a:t>Document</a:t>
             </a:r>
-            <a:endParaRPr lang="zh-CN" sz="1612"/>
+            <a:endParaRPr lang="zh-CN" sz="1000" dirty="0"/>
           </a:p>
           <a:p>
             <a:pPr algn="ctr"/>
             <a:r>
-              <a:rPr lang="zh-CN" sz="1612">
+              <a:rPr lang="zh-CN" sz="1000" dirty="0">
                 <a:solidFill>
                   <a:srgbClr val="142A38"/>
                 </a:solidFill>
@@ -4846,7 +5155,7 @@
               </a:rPr>
               <a:t>Understanding</a:t>
             </a:r>
-            <a:endParaRPr lang="zh-CN" sz="1612"/>
+            <a:endParaRPr lang="zh-CN" sz="1000" dirty="0"/>
           </a:p>
         </p:txBody>
       </p:sp>
@@ -4870,14 +5179,14 @@
           </a:ln>
         </p:spPr>
         <p:txBody>
-          <a:bodyPr wrap="none" anchor="ctr" lIns="0" tIns="0" rIns="0" bIns="0">
+          <a:bodyPr wrap="none" lIns="0" tIns="0" rIns="0" bIns="0" anchor="ctr">
             <a:noAutofit/>
           </a:bodyPr>
           <a:lstStyle/>
           <a:p>
             <a:pPr algn="ctr"/>
             <a:r>
-              <a:rPr lang="zh-CN" sz="1484" b="1">
+              <a:rPr lang="zh-CN" sz="1000" b="1" dirty="0">
                 <a:solidFill>
                   <a:srgbClr val="142A38"/>
                 </a:solidFill>
@@ -4887,12 +5196,12 @@
               </a:rPr>
               <a:t>Benchmarks &amp;</a:t>
             </a:r>
-            <a:endParaRPr lang="zh-CN" sz="1484"/>
+            <a:endParaRPr lang="zh-CN" sz="1000" dirty="0"/>
           </a:p>
           <a:p>
             <a:pPr algn="ctr"/>
             <a:r>
-              <a:rPr lang="zh-CN" sz="1484" b="1">
+              <a:rPr lang="zh-CN" sz="1000" b="1" dirty="0">
                 <a:solidFill>
                   <a:srgbClr val="142A38"/>
                 </a:solidFill>
@@ -4902,7 +5211,7 @@
               </a:rPr>
               <a:t>Evaluation Tools</a:t>
             </a:r>
-            <a:endParaRPr lang="zh-CN" sz="1484"/>
+            <a:endParaRPr lang="zh-CN" sz="1000" dirty="0"/>
           </a:p>
         </p:txBody>
       </p:sp>
@@ -4926,14 +5235,14 @@
           </a:ln>
         </p:spPr>
         <p:txBody>
-          <a:bodyPr wrap="none" anchor="ctr" lIns="0" tIns="0" rIns="0" bIns="0">
+          <a:bodyPr wrap="none" lIns="0" tIns="0" rIns="0" bIns="0" anchor="ctr">
             <a:noAutofit/>
           </a:bodyPr>
           <a:lstStyle/>
           <a:p>
             <a:pPr algn="ctr"/>
             <a:r>
-              <a:rPr lang="zh-CN" sz="1227" b="1">
+              <a:rPr lang="zh-CN" sz="1000" b="1" dirty="0">
                 <a:solidFill>
                   <a:srgbClr val="142A38"/>
                 </a:solidFill>
@@ -4943,7 +5252,7 @@
               </a:rPr>
               <a:t>QA &amp; knowledge benchmarks</a:t>
             </a:r>
-            <a:endParaRPr lang="zh-CN" sz="1227"/>
+            <a:endParaRPr lang="zh-CN" sz="1000" dirty="0"/>
           </a:p>
         </p:txBody>
       </p:sp>
@@ -4967,14 +5276,14 @@
           </a:ln>
         </p:spPr>
         <p:txBody>
-          <a:bodyPr wrap="none" anchor="ctr" lIns="0" tIns="0" rIns="0" bIns="0">
+          <a:bodyPr wrap="none" lIns="0" tIns="0" rIns="0" bIns="0" anchor="ctr">
             <a:noAutofit/>
           </a:bodyPr>
           <a:lstStyle/>
           <a:p>
             <a:pPr algn="ctr"/>
             <a:r>
-              <a:rPr lang="zh-CN" sz="1246">
+              <a:rPr lang="zh-CN" sz="800" dirty="0">
                 <a:solidFill>
                   <a:srgbClr val="142A38"/>
                 </a:solidFill>
@@ -4984,7 +5293,7 @@
               </a:rPr>
               <a:t>HotpotQA</a:t>
             </a:r>
-            <a:endParaRPr lang="zh-CN" sz="1246"/>
+            <a:endParaRPr lang="zh-CN" sz="800" dirty="0"/>
           </a:p>
         </p:txBody>
       </p:sp>
@@ -5008,14 +5317,14 @@
           </a:ln>
         </p:spPr>
         <p:txBody>
-          <a:bodyPr wrap="none" anchor="ctr" lIns="0" tIns="0" rIns="0" bIns="0">
+          <a:bodyPr wrap="none" lIns="0" tIns="0" rIns="0" bIns="0" anchor="ctr">
             <a:noAutofit/>
           </a:bodyPr>
           <a:lstStyle/>
           <a:p>
             <a:pPr algn="ctr"/>
             <a:r>
-              <a:rPr lang="zh-CN" sz="1026" b="1">
+              <a:rPr lang="zh-CN" sz="1026" b="1" dirty="0">
                 <a:solidFill>
                   <a:srgbClr val="142A38"/>
                 </a:solidFill>
@@ -5025,7 +5334,7 @@
               </a:rPr>
               <a:t>QA</a:t>
             </a:r>
-            <a:endParaRPr lang="zh-CN" sz="1026"/>
+            <a:endParaRPr lang="zh-CN" sz="1026" dirty="0"/>
           </a:p>
         </p:txBody>
       </p:sp>
@@ -5049,14 +5358,14 @@
           </a:ln>
         </p:spPr>
         <p:txBody>
-          <a:bodyPr wrap="none" anchor="ctr" lIns="0" tIns="0" rIns="0" bIns="0">
+          <a:bodyPr wrap="none" lIns="0" tIns="0" rIns="0" bIns="0" anchor="ctr">
             <a:noAutofit/>
           </a:bodyPr>
           <a:lstStyle/>
           <a:p>
             <a:pPr algn="ctr"/>
             <a:r>
-              <a:rPr lang="zh-CN" sz="1246">
+              <a:rPr lang="zh-CN" sz="800" dirty="0">
                 <a:solidFill>
                   <a:srgbClr val="142A38"/>
                 </a:solidFill>
@@ -5066,7 +5375,7 @@
               </a:rPr>
               <a:t>CoQA</a:t>
             </a:r>
-            <a:endParaRPr lang="zh-CN" sz="1246"/>
+            <a:endParaRPr lang="zh-CN" sz="800" dirty="0"/>
           </a:p>
         </p:txBody>
       </p:sp>
@@ -5090,14 +5399,14 @@
           </a:ln>
         </p:spPr>
         <p:txBody>
-          <a:bodyPr wrap="none" anchor="ctr" lIns="0" tIns="0" rIns="0" bIns="0">
+          <a:bodyPr wrap="none" lIns="0" tIns="0" rIns="0" bIns="0" anchor="ctr">
             <a:noAutofit/>
           </a:bodyPr>
           <a:lstStyle/>
           <a:p>
             <a:pPr algn="ctr"/>
             <a:r>
-              <a:rPr lang="zh-CN" sz="1246">
+              <a:rPr lang="zh-CN" sz="800" dirty="0">
                 <a:solidFill>
                   <a:srgbClr val="142A38"/>
                 </a:solidFill>
@@ -5107,7 +5416,7 @@
               </a:rPr>
               <a:t>MMLU</a:t>
             </a:r>
-            <a:endParaRPr lang="zh-CN" sz="1246"/>
+            <a:endParaRPr lang="zh-CN" sz="800" dirty="0"/>
           </a:p>
         </p:txBody>
       </p:sp>
@@ -5131,14 +5440,14 @@
           </a:ln>
         </p:spPr>
         <p:txBody>
-          <a:bodyPr wrap="none" anchor="ctr" lIns="0" tIns="0" rIns="0" bIns="0">
+          <a:bodyPr wrap="none" lIns="0" tIns="0" rIns="0" bIns="0" anchor="ctr">
             <a:noAutofit/>
           </a:bodyPr>
           <a:lstStyle/>
           <a:p>
             <a:pPr algn="ctr"/>
             <a:r>
-              <a:rPr lang="zh-CN" sz="1246">
+              <a:rPr lang="zh-CN" sz="800" dirty="0">
                 <a:solidFill>
                   <a:srgbClr val="142A38"/>
                 </a:solidFill>
@@ -5148,7 +5457,7 @@
               </a:rPr>
               <a:t>MuSiQue</a:t>
             </a:r>
-            <a:endParaRPr lang="zh-CN" sz="1246"/>
+            <a:endParaRPr lang="zh-CN" sz="800" dirty="0"/>
           </a:p>
         </p:txBody>
       </p:sp>
@@ -5172,14 +5481,14 @@
           </a:ln>
         </p:spPr>
         <p:txBody>
-          <a:bodyPr wrap="none" anchor="ctr" lIns="0" tIns="0" rIns="0" bIns="0">
+          <a:bodyPr wrap="none" lIns="0" tIns="0" rIns="0" bIns="0" anchor="ctr">
             <a:noAutofit/>
           </a:bodyPr>
           <a:lstStyle/>
           <a:p>
             <a:pPr algn="ctr"/>
             <a:r>
-              <a:rPr lang="zh-CN" sz="1227" b="1">
+              <a:rPr lang="zh-CN" sz="1000" b="1" dirty="0">
                 <a:solidFill>
                   <a:srgbClr val="142A38"/>
                 </a:solidFill>
@@ -5189,7 +5498,7 @@
               </a:rPr>
               <a:t>Agent-task benchmarks</a:t>
             </a:r>
-            <a:endParaRPr lang="zh-CN" sz="1227"/>
+            <a:endParaRPr lang="zh-CN" sz="1000" dirty="0"/>
           </a:p>
         </p:txBody>
       </p:sp>
@@ -5213,14 +5522,14 @@
           </a:ln>
         </p:spPr>
         <p:txBody>
-          <a:bodyPr wrap="none" anchor="ctr" lIns="0" tIns="0" rIns="0" bIns="0">
+          <a:bodyPr wrap="none" lIns="0" tIns="0" rIns="0" bIns="0" anchor="ctr">
             <a:noAutofit/>
           </a:bodyPr>
           <a:lstStyle/>
           <a:p>
             <a:pPr algn="ctr"/>
             <a:r>
-              <a:rPr lang="zh-CN" sz="1246">
+              <a:rPr lang="zh-CN" sz="800" dirty="0">
                 <a:solidFill>
                   <a:srgbClr val="142A38"/>
                 </a:solidFill>
@@ -5230,7 +5539,7 @@
               </a:rPr>
               <a:t>AgentBench</a:t>
             </a:r>
-            <a:endParaRPr lang="zh-CN" sz="1246"/>
+            <a:endParaRPr lang="zh-CN" sz="800" dirty="0"/>
           </a:p>
         </p:txBody>
       </p:sp>
@@ -5254,14 +5563,14 @@
           </a:ln>
         </p:spPr>
         <p:txBody>
-          <a:bodyPr wrap="none" anchor="ctr" lIns="0" tIns="0" rIns="0" bIns="0">
+          <a:bodyPr wrap="none" lIns="0" tIns="0" rIns="0" bIns="0" anchor="ctr">
             <a:noAutofit/>
           </a:bodyPr>
           <a:lstStyle/>
           <a:p>
             <a:pPr algn="ctr"/>
             <a:r>
-              <a:rPr lang="zh-CN" sz="1246">
+              <a:rPr lang="zh-CN" sz="800" dirty="0">
                 <a:solidFill>
                   <a:srgbClr val="142A38"/>
                 </a:solidFill>
@@ -5271,7 +5580,7 @@
               </a:rPr>
               <a:t>GAIA</a:t>
             </a:r>
-            <a:endParaRPr lang="zh-CN" sz="1246"/>
+            <a:endParaRPr lang="zh-CN" sz="800" dirty="0"/>
           </a:p>
         </p:txBody>
       </p:sp>
@@ -5295,14 +5604,14 @@
           </a:ln>
         </p:spPr>
         <p:txBody>
-          <a:bodyPr wrap="none" anchor="ctr" lIns="0" tIns="0" rIns="0" bIns="0">
+          <a:bodyPr wrap="none" lIns="0" tIns="0" rIns="0" bIns="0" anchor="ctr">
             <a:noAutofit/>
           </a:bodyPr>
           <a:lstStyle/>
           <a:p>
             <a:pPr algn="ctr"/>
             <a:r>
-              <a:rPr lang="zh-CN" sz="1246">
+              <a:rPr lang="zh-CN" sz="800" dirty="0">
                 <a:solidFill>
                   <a:srgbClr val="142A38"/>
                 </a:solidFill>
@@ -5312,7 +5621,7 @@
               </a:rPr>
               <a:t>WebArena</a:t>
             </a:r>
-            <a:endParaRPr lang="zh-CN" sz="1246"/>
+            <a:endParaRPr lang="zh-CN" sz="800" dirty="0"/>
           </a:p>
         </p:txBody>
       </p:sp>
@@ -5324,7 +5633,7 @@
         </p:nvSpPr>
         <p:spPr>
           <a:xfrm>
-            <a:off x="9498672" y="6369389"/>
+            <a:off x="9407930" y="6369389"/>
             <a:ext cx="1151725" cy="226855"/>
           </a:xfrm>
           <a:prstGeom prst="rect">
@@ -5336,14 +5645,14 @@
           </a:ln>
         </p:spPr>
         <p:txBody>
-          <a:bodyPr wrap="none" anchor="ctr" lIns="0" tIns="0" rIns="0" bIns="0">
+          <a:bodyPr wrap="none" lIns="0" tIns="0" rIns="0" bIns="0" anchor="ctr">
             <a:noAutofit/>
           </a:bodyPr>
           <a:lstStyle/>
           <a:p>
             <a:pPr algn="ctr"/>
             <a:r>
-              <a:rPr lang="zh-CN" sz="1191" b="1">
+              <a:rPr lang="zh-CN" sz="1000" b="1" dirty="0">
                 <a:solidFill>
                   <a:srgbClr val="142A38"/>
                 </a:solidFill>
@@ -5353,7 +5662,7 @@
               </a:rPr>
               <a:t>RAG tool: AutoRAG</a:t>
             </a:r>
-            <a:endParaRPr lang="zh-CN" sz="1191"/>
+            <a:endParaRPr lang="zh-CN" sz="1000" dirty="0"/>
           </a:p>
         </p:txBody>
       </p:sp>
@@ -5377,14 +5686,14 @@
           </a:ln>
         </p:spPr>
         <p:txBody>
-          <a:bodyPr wrap="none" anchor="ctr" lIns="0" tIns="0" rIns="0" bIns="0">
+          <a:bodyPr wrap="none" lIns="0" tIns="0" rIns="0" bIns="0" anchor="ctr">
             <a:noAutofit/>
           </a:bodyPr>
           <a:lstStyle/>
           <a:p>
             <a:pPr algn="ctr"/>
             <a:r>
-              <a:rPr lang="zh-CN" sz="1557">
+              <a:rPr lang="zh-CN" sz="1000" dirty="0">
                 <a:solidFill>
                   <a:srgbClr val="142A38"/>
                 </a:solidFill>
@@ -5394,12 +5703,12 @@
               </a:rPr>
               <a:t>Answer &amp; Task</a:t>
             </a:r>
-            <a:endParaRPr lang="zh-CN" sz="1557"/>
+            <a:endParaRPr lang="zh-CN" sz="1000" dirty="0"/>
           </a:p>
           <a:p>
             <a:pPr algn="ctr"/>
             <a:r>
-              <a:rPr lang="zh-CN" sz="1557">
+              <a:rPr lang="zh-CN" sz="1000" dirty="0">
                 <a:solidFill>
                   <a:srgbClr val="142A38"/>
                 </a:solidFill>
@@ -5409,7 +5718,7 @@
               </a:rPr>
               <a:t>Assessment</a:t>
             </a:r>
-            <a:endParaRPr lang="zh-CN" sz="1557"/>
+            <a:endParaRPr lang="zh-CN" sz="1000" dirty="0"/>
           </a:p>
         </p:txBody>
       </p:sp>
@@ -5433,14 +5742,14 @@
           </a:ln>
         </p:spPr>
         <p:txBody>
-          <a:bodyPr wrap="none" anchor="ctr" lIns="0" tIns="0" rIns="0" bIns="0">
+          <a:bodyPr wrap="none" lIns="0" tIns="0" rIns="0" bIns="0" anchor="ctr">
             <a:noAutofit/>
           </a:bodyPr>
           <a:lstStyle/>
           <a:p>
             <a:pPr algn="ctr"/>
             <a:r>
-              <a:rPr lang="zh-CN" sz="1466">
+              <a:rPr lang="zh-CN" sz="1000" dirty="0">
                 <a:solidFill>
                   <a:srgbClr val="142A38"/>
                 </a:solidFill>
@@ -5450,12 +5759,12 @@
               </a:rPr>
               <a:t>RAG Component</a:t>
             </a:r>
-            <a:endParaRPr lang="zh-CN" sz="1466"/>
+            <a:endParaRPr lang="zh-CN" sz="1000" dirty="0"/>
           </a:p>
           <a:p>
             <a:pPr algn="ctr"/>
             <a:r>
-              <a:rPr lang="zh-CN" sz="1466">
+              <a:rPr lang="zh-CN" sz="1000" dirty="0">
                 <a:solidFill>
                   <a:srgbClr val="142A38"/>
                 </a:solidFill>
@@ -5465,7 +5774,7 @@
               </a:rPr>
               <a:t>Evaluation</a:t>
             </a:r>
-            <a:endParaRPr lang="zh-CN" sz="1466"/>
+            <a:endParaRPr lang="zh-CN" sz="1000" dirty="0"/>
           </a:p>
         </p:txBody>
       </p:sp>
@@ -5489,7 +5798,7 @@
           </a:ln>
         </p:spPr>
         <p:txBody>
-          <a:bodyPr wrap="none" anchor="ctr" lIns="0" tIns="0" rIns="0" bIns="0">
+          <a:bodyPr wrap="none" lIns="0" tIns="0" rIns="0" bIns="0" anchor="ctr">
             <a:noAutofit/>
           </a:bodyPr>
           <a:lstStyle/>
@@ -5530,14 +5839,14 @@
           </a:ln>
         </p:spPr>
         <p:txBody>
-          <a:bodyPr wrap="none" anchor="ctr" lIns="0" tIns="0" rIns="0" bIns="0">
+          <a:bodyPr wrap="none" lIns="0" tIns="0" rIns="0" bIns="0" anchor="ctr">
             <a:noAutofit/>
           </a:bodyPr>
           <a:lstStyle/>
           <a:p>
             <a:pPr algn="ctr"/>
             <a:r>
-              <a:rPr lang="zh-CN" sz="2107" b="1">
+              <a:rPr lang="zh-CN" sz="1000" b="1" dirty="0">
                 <a:solidFill>
                   <a:srgbClr val="FFFFFF"/>
                 </a:solidFill>
@@ -5547,12 +5856,12 @@
               </a:rPr>
               <a:t>Multi-Agent</a:t>
             </a:r>
-            <a:endParaRPr lang="zh-CN" sz="2107"/>
+            <a:endParaRPr lang="zh-CN" sz="1000" dirty="0"/>
           </a:p>
           <a:p>
             <a:pPr algn="ctr"/>
             <a:r>
-              <a:rPr lang="zh-CN" sz="2107" b="1">
+              <a:rPr lang="zh-CN" sz="1000" b="1" dirty="0">
                 <a:solidFill>
                   <a:srgbClr val="FFFFFF"/>
                 </a:solidFill>
@@ -5562,7 +5871,7 @@
               </a:rPr>
               <a:t>QA System</a:t>
             </a:r>
-            <a:endParaRPr lang="zh-CN" sz="2107"/>
+            <a:endParaRPr lang="zh-CN" sz="1000" dirty="0"/>
           </a:p>
         </p:txBody>
       </p:sp>
@@ -5586,14 +5895,14 @@
           </a:ln>
         </p:spPr>
         <p:txBody>
-          <a:bodyPr wrap="none" anchor="ctr" lIns="0" tIns="0" rIns="0" bIns="0">
+          <a:bodyPr wrap="none" lIns="0" tIns="0" rIns="0" bIns="0" anchor="ctr">
             <a:noAutofit/>
           </a:bodyPr>
           <a:lstStyle/>
           <a:p>
             <a:pPr algn="ctr"/>
             <a:r>
-              <a:rPr lang="zh-CN" sz="1648">
+              <a:rPr lang="zh-CN" sz="1000" dirty="0">
                 <a:solidFill>
                   <a:srgbClr val="142A38"/>
                 </a:solidFill>
@@ -5603,12 +5912,12 @@
               </a:rPr>
               <a:t>System Construction</a:t>
             </a:r>
-            <a:endParaRPr lang="zh-CN" sz="1648"/>
+            <a:endParaRPr lang="zh-CN" sz="1000" dirty="0"/>
           </a:p>
           <a:p>
             <a:pPr algn="ctr"/>
             <a:r>
-              <a:rPr lang="zh-CN" sz="1648">
+              <a:rPr lang="zh-CN" sz="1000" dirty="0">
                 <a:solidFill>
                   <a:srgbClr val="142A38"/>
                 </a:solidFill>
@@ -5618,7 +5927,7 @@
               </a:rPr>
               <a:t>&amp; Evaluation</a:t>
             </a:r>
-            <a:endParaRPr lang="zh-CN" sz="1648"/>
+            <a:endParaRPr lang="zh-CN" sz="1000" dirty="0"/>
           </a:p>
         </p:txBody>
       </p:sp>
@@ -5642,14 +5951,14 @@
           </a:ln>
         </p:spPr>
         <p:txBody>
-          <a:bodyPr wrap="none" anchor="ctr" lIns="0" tIns="0" rIns="0" bIns="0">
+          <a:bodyPr wrap="none" lIns="0" tIns="0" rIns="0" bIns="0" anchor="ctr">
             <a:noAutofit/>
           </a:bodyPr>
           <a:lstStyle/>
           <a:p>
             <a:pPr algn="ctr"/>
             <a:r>
-              <a:rPr lang="zh-CN" sz="1209">
+              <a:rPr lang="zh-CN" sz="1209" dirty="0">
                 <a:solidFill>
                   <a:srgbClr val="607181"/>
                 </a:solidFill>
@@ -5659,10 +5968,46 @@
               </a:rPr>
               <a:t>Conceptual resource map; process assessment needs trace-level measures.</a:t>
             </a:r>
-            <a:endParaRPr lang="zh-CN" sz="1209"/>
-          </a:p>
-        </p:txBody>
-      </p:sp>
+            <a:endParaRPr lang="zh-CN" sz="1209" dirty="0"/>
+          </a:p>
+        </p:txBody>
+      </p:sp>
+      <p:pic>
+        <p:nvPicPr>
+          <p:cNvPr id="177" name="图片 176">
+            <a:extLst>
+              <a:ext uri="{FF2B5EF4-FFF2-40B4-BE49-F238E27FC236}">
+                <a16:creationId xmlns:a16="http://schemas.microsoft.com/office/drawing/2014/main" id="{28F6D941-52D4-D1C1-FBCD-BA4E399A0CBA}"/>
+              </a:ext>
+            </a:extLst>
+          </p:cNvPr>
+          <p:cNvPicPr>
+            <a:picLocks noChangeAspect="1"/>
+          </p:cNvPicPr>
+          <p:nvPr/>
+        </p:nvPicPr>
+        <p:blipFill>
+          <a:blip r:embed="rId2">
+            <a:extLst>
+              <a:ext uri="{28A0092B-C50C-407E-A947-70E740481C1C}">
+                <a14:useLocalDpi xmlns:a14="http://schemas.microsoft.com/office/drawing/2010/main" val="0"/>
+              </a:ext>
+            </a:extLst>
+          </a:blip>
+          <a:stretch>
+            <a:fillRect/>
+          </a:stretch>
+        </p:blipFill>
+        <p:spPr>
+          <a:xfrm>
+            <a:off x="2698984" y="1127630"/>
+            <a:ext cx="895916" cy="895916"/>
+          </a:xfrm>
+          <a:prstGeom prst="rect">
+            <a:avLst/>
+          </a:prstGeom>
+        </p:spPr>
+      </p:pic>
     </p:spTree>
   </p:cSld>
   <p:clrMapOvr>
@@ -5777,5 +6122,7 @@
       </a:bgFillStyleLst>
     </a:fmtScheme>
   </a:themeElements>
+  <a:objectDefaults/>
+  <a:extraClrSchemeLst/>
 </a:theme>
 </file>
--- a/output/figure5_editable/20261013-163435-Figure5_resource_map/final/Figure5_resource_map_edited.pptx
+++ b/output/figure5_editable/20261013-163435-Figure5_resource_map/final/Figure5_resource_map_edited.pptx
@@ -104,6 +104,11 @@
       </a:defRPr>
     </a:lvl9pPr>
   </p:defaultTextStyle>
+  <p:extLst>
+    <p:ext uri="{EFAFB233-063F-42B5-8137-9DF3F51BA10A}">
+      <p15:sldGuideLst xmlns:p15="http://schemas.microsoft.com/office/powerpoint/2012/main"/>
+    </p:ext>
+  </p:extLst>
 </p:presentation>
 </file>
 
@@ -4205,7 +4210,7 @@
           <a:p>
             <a:pPr algn="ctr"/>
             <a:r>
-              <a:rPr lang="zh-CN" sz="1000" b="1" dirty="0">
+              <a:rPr lang="zh-CN" sz="1100" b="1" dirty="0">
                 <a:solidFill>
                   <a:srgbClr val="142A38"/>
                 </a:solidFill>
@@ -4215,7 +4220,7 @@
               </a:rPr>
               <a:t>Foundation Layer</a:t>
             </a:r>
-            <a:endParaRPr lang="zh-CN" sz="1000" dirty="0"/>
+            <a:endParaRPr lang="zh-CN" sz="1100" dirty="0"/>
           </a:p>
         </p:txBody>
       </p:sp>
@@ -4246,7 +4251,7 @@
           <a:p>
             <a:pPr algn="ctr"/>
             <a:r>
-              <a:rPr lang="zh-CN" sz="1050" dirty="0">
+              <a:rPr lang="zh-CN" sz="1100" dirty="0">
                 <a:solidFill>
                   <a:srgbClr val="142A38"/>
                 </a:solidFill>
@@ -4256,12 +4261,12 @@
               </a:rPr>
               <a:t>Model &amp; Retrieval</a:t>
             </a:r>
-            <a:endParaRPr lang="zh-CN" sz="1050" dirty="0"/>
+            <a:endParaRPr lang="zh-CN" sz="1100" dirty="0"/>
           </a:p>
           <a:p>
             <a:pPr algn="ctr"/>
             <a:r>
-              <a:rPr lang="zh-CN" sz="1050" dirty="0">
+              <a:rPr lang="zh-CN" sz="1100" dirty="0">
                 <a:solidFill>
                   <a:srgbClr val="142A38"/>
                 </a:solidFill>
@@ -4271,7 +4276,7 @@
               </a:rPr>
               <a:t>Components</a:t>
             </a:r>
-            <a:endParaRPr lang="zh-CN" sz="1050" dirty="0"/>
+            <a:endParaRPr lang="zh-CN" sz="1100" dirty="0"/>
           </a:p>
         </p:txBody>
       </p:sp>
@@ -4343,7 +4348,7 @@
           <a:p>
             <a:pPr algn="ctr"/>
             <a:r>
-              <a:rPr lang="zh-CN" sz="800" dirty="0">
+              <a:rPr lang="zh-CN" sz="1100" dirty="0">
                 <a:solidFill>
                   <a:srgbClr val="142A38"/>
                 </a:solidFill>
@@ -4353,7 +4358,7 @@
               </a:rPr>
               <a:t>LangChain</a:t>
             </a:r>
-            <a:endParaRPr lang="zh-CN" sz="800" dirty="0"/>
+            <a:endParaRPr lang="zh-CN" sz="1100" dirty="0"/>
           </a:p>
         </p:txBody>
       </p:sp>
@@ -4384,7 +4389,7 @@
           <a:p>
             <a:pPr algn="ctr"/>
             <a:r>
-              <a:rPr lang="zh-CN" sz="800" dirty="0">
+              <a:rPr lang="zh-CN" sz="1100" dirty="0">
                 <a:solidFill>
                   <a:srgbClr val="142A38"/>
                 </a:solidFill>
@@ -4394,7 +4399,7 @@
               </a:rPr>
               <a:t>LlamaIndex</a:t>
             </a:r>
-            <a:endParaRPr lang="zh-CN" sz="800" dirty="0"/>
+            <a:endParaRPr lang="zh-CN" sz="1100" dirty="0"/>
           </a:p>
         </p:txBody>
       </p:sp>
@@ -4425,7 +4430,7 @@
           <a:p>
             <a:pPr algn="ctr"/>
             <a:r>
-              <a:rPr lang="zh-CN" sz="1000" dirty="0">
+              <a:rPr lang="zh-CN" sz="1100" dirty="0">
                 <a:solidFill>
                   <a:srgbClr val="142A38"/>
                 </a:solidFill>
@@ -4435,12 +4440,12 @@
               </a:rPr>
               <a:t>Model</a:t>
             </a:r>
-            <a:endParaRPr lang="zh-CN" sz="1000" dirty="0"/>
+            <a:endParaRPr lang="zh-CN" sz="1100" dirty="0"/>
           </a:p>
           <a:p>
             <a:pPr algn="ctr"/>
             <a:r>
-              <a:rPr lang="zh-CN" sz="1000" dirty="0">
+              <a:rPr lang="zh-CN" sz="1100" dirty="0">
                 <a:solidFill>
                   <a:srgbClr val="142A38"/>
                 </a:solidFill>
@@ -4450,7 +4455,7 @@
               </a:rPr>
               <a:t>Interfaces</a:t>
             </a:r>
-            <a:endParaRPr lang="zh-CN" sz="1000" dirty="0"/>
+            <a:endParaRPr lang="zh-CN" sz="1100" dirty="0"/>
           </a:p>
         </p:txBody>
       </p:sp>
@@ -4481,7 +4486,7 @@
           <a:p>
             <a:pPr algn="ctr"/>
             <a:r>
-              <a:rPr lang="zh-CN" sz="1000" dirty="0">
+              <a:rPr lang="zh-CN" sz="1100" dirty="0">
                 <a:solidFill>
                   <a:srgbClr val="142A38"/>
                 </a:solidFill>
@@ -4491,12 +4496,12 @@
               </a:rPr>
               <a:t>Retrieval</a:t>
             </a:r>
-            <a:endParaRPr lang="zh-CN" sz="1000" dirty="0"/>
+            <a:endParaRPr lang="zh-CN" sz="1100" dirty="0"/>
           </a:p>
           <a:p>
             <a:pPr algn="ctr"/>
             <a:r>
-              <a:rPr lang="zh-CN" sz="1000" dirty="0">
+              <a:rPr lang="zh-CN" sz="1100" dirty="0">
                 <a:solidFill>
                   <a:srgbClr val="142A38"/>
                 </a:solidFill>
@@ -4506,7 +4511,7 @@
               </a:rPr>
               <a:t>Components</a:t>
             </a:r>
-            <a:endParaRPr lang="zh-CN" sz="1000" dirty="0"/>
+            <a:endParaRPr lang="zh-CN" sz="1100" dirty="0"/>
           </a:p>
         </p:txBody>
       </p:sp>
@@ -4537,7 +4542,7 @@
           <a:p>
             <a:pPr algn="ctr"/>
             <a:r>
-              <a:rPr lang="zh-CN" sz="1000" b="1" dirty="0">
+              <a:rPr lang="zh-CN" sz="1100" b="1" dirty="0">
                 <a:solidFill>
                   <a:srgbClr val="142A38"/>
                 </a:solidFill>
@@ -4547,7 +4552,7 @@
               </a:rPr>
               <a:t>Orchestration Layer</a:t>
             </a:r>
-            <a:endParaRPr lang="zh-CN" sz="1000" dirty="0"/>
+            <a:endParaRPr lang="zh-CN" sz="1100" dirty="0"/>
           </a:p>
         </p:txBody>
       </p:sp>
@@ -4578,7 +4583,7 @@
           <a:p>
             <a:pPr algn="ctr"/>
             <a:r>
-              <a:rPr lang="zh-CN" sz="1050" dirty="0">
+              <a:rPr lang="zh-CN" sz="1100" dirty="0">
                 <a:solidFill>
                   <a:srgbClr val="142A38"/>
                 </a:solidFill>
@@ -4588,7 +4593,7 @@
               </a:rPr>
               <a:t>Multi-Agent Frameworks</a:t>
             </a:r>
-            <a:endParaRPr lang="zh-CN" sz="1050" dirty="0"/>
+            <a:endParaRPr lang="zh-CN" sz="1100" dirty="0"/>
           </a:p>
         </p:txBody>
       </p:sp>
@@ -4619,7 +4624,7 @@
           <a:p>
             <a:pPr algn="ctr"/>
             <a:r>
-              <a:rPr lang="zh-CN" sz="800" dirty="0">
+              <a:rPr lang="zh-CN" sz="1100" dirty="0">
                 <a:solidFill>
                   <a:srgbClr val="142A38"/>
                 </a:solidFill>
@@ -4629,7 +4634,7 @@
               </a:rPr>
               <a:t>AutoGen</a:t>
             </a:r>
-            <a:endParaRPr lang="zh-CN" sz="800" dirty="0"/>
+            <a:endParaRPr lang="zh-CN" sz="1100" dirty="0"/>
           </a:p>
         </p:txBody>
       </p:sp>
@@ -4660,7 +4665,7 @@
           <a:p>
             <a:pPr algn="ctr"/>
             <a:r>
-              <a:rPr lang="zh-CN" sz="800" dirty="0">
+              <a:rPr lang="zh-CN" sz="1100" dirty="0">
                 <a:solidFill>
                   <a:srgbClr val="142A38"/>
                 </a:solidFill>
@@ -4670,7 +4675,7 @@
               </a:rPr>
               <a:t>CrewAI</a:t>
             </a:r>
-            <a:endParaRPr lang="zh-CN" sz="800" dirty="0"/>
+            <a:endParaRPr lang="zh-CN" sz="1100" dirty="0"/>
           </a:p>
         </p:txBody>
       </p:sp>
@@ -4701,7 +4706,7 @@
           <a:p>
             <a:pPr algn="ctr"/>
             <a:r>
-              <a:rPr lang="zh-CN" sz="800" dirty="0">
+              <a:rPr lang="zh-CN" sz="1100" dirty="0">
                 <a:solidFill>
                   <a:srgbClr val="142A38"/>
                 </a:solidFill>
@@ -4711,7 +4716,7 @@
               </a:rPr>
               <a:t>MetaGPT</a:t>
             </a:r>
-            <a:endParaRPr lang="zh-CN" sz="800" dirty="0"/>
+            <a:endParaRPr lang="zh-CN" sz="1100" dirty="0"/>
           </a:p>
         </p:txBody>
       </p:sp>
@@ -4742,7 +4747,7 @@
           <a:p>
             <a:pPr algn="ctr"/>
             <a:r>
-              <a:rPr lang="zh-CN" sz="1000" dirty="0">
+              <a:rPr lang="zh-CN" sz="1100" dirty="0">
                 <a:solidFill>
                   <a:srgbClr val="142A38"/>
                 </a:solidFill>
@@ -4752,12 +4757,12 @@
               </a:rPr>
               <a:t>Role</a:t>
             </a:r>
-            <a:endParaRPr lang="zh-CN" sz="1000" dirty="0"/>
+            <a:endParaRPr lang="zh-CN" sz="1100" dirty="0"/>
           </a:p>
           <a:p>
             <a:pPr algn="ctr"/>
             <a:r>
-              <a:rPr lang="zh-CN" sz="1000" dirty="0">
+              <a:rPr lang="zh-CN" sz="1100" dirty="0">
                 <a:solidFill>
                   <a:srgbClr val="142A38"/>
                 </a:solidFill>
@@ -4767,7 +4772,7 @@
               </a:rPr>
               <a:t>Definition</a:t>
             </a:r>
-            <a:endParaRPr lang="zh-CN" sz="1000" dirty="0"/>
+            <a:endParaRPr lang="zh-CN" sz="1100" dirty="0"/>
           </a:p>
         </p:txBody>
       </p:sp>
@@ -4798,7 +4803,7 @@
           <a:p>
             <a:pPr algn="ctr"/>
             <a:r>
-              <a:rPr lang="zh-CN" sz="1000" dirty="0">
+              <a:rPr lang="zh-CN" sz="1100" dirty="0">
                 <a:solidFill>
                   <a:srgbClr val="142A38"/>
                 </a:solidFill>
@@ -4808,12 +4813,12 @@
               </a:rPr>
               <a:t>Workflow</a:t>
             </a:r>
-            <a:endParaRPr lang="zh-CN" sz="1000" dirty="0"/>
+            <a:endParaRPr lang="zh-CN" sz="1100" dirty="0"/>
           </a:p>
           <a:p>
             <a:pPr algn="ctr"/>
             <a:r>
-              <a:rPr lang="zh-CN" sz="1000" dirty="0">
+              <a:rPr lang="zh-CN" sz="1100" dirty="0">
                 <a:solidFill>
                   <a:srgbClr val="142A38"/>
                 </a:solidFill>
@@ -4823,7 +4828,7 @@
               </a:rPr>
               <a:t>Control</a:t>
             </a:r>
-            <a:endParaRPr lang="zh-CN" sz="1000" dirty="0"/>
+            <a:endParaRPr lang="zh-CN" sz="1100" dirty="0"/>
           </a:p>
         </p:txBody>
       </p:sp>
@@ -4854,7 +4859,7 @@
           <a:p>
             <a:pPr algn="ctr"/>
             <a:r>
-              <a:rPr lang="zh-CN" sz="1000" b="1" dirty="0">
+              <a:rPr lang="zh-CN" sz="1100" b="1" dirty="0">
                 <a:solidFill>
                   <a:srgbClr val="142A38"/>
                 </a:solidFill>
@@ -4864,12 +4869,12 @@
               </a:rPr>
               <a:t>Application</a:t>
             </a:r>
-            <a:endParaRPr lang="zh-CN" sz="1000" dirty="0"/>
+            <a:endParaRPr lang="zh-CN" sz="1100" dirty="0"/>
           </a:p>
           <a:p>
             <a:pPr algn="ctr"/>
             <a:r>
-              <a:rPr lang="zh-CN" sz="1000" b="1" dirty="0">
+              <a:rPr lang="zh-CN" sz="1100" b="1" dirty="0">
                 <a:solidFill>
                   <a:srgbClr val="142A38"/>
                 </a:solidFill>
@@ -4879,7 +4884,7 @@
               </a:rPr>
               <a:t>Resource Layer</a:t>
             </a:r>
-            <a:endParaRPr lang="zh-CN" sz="1000" dirty="0"/>
+            <a:endParaRPr lang="zh-CN" sz="1100" dirty="0"/>
           </a:p>
         </p:txBody>
       </p:sp>
@@ -4910,7 +4915,7 @@
           <a:p>
             <a:pPr algn="ctr"/>
             <a:r>
-              <a:rPr lang="zh-CN" sz="1050" dirty="0">
+              <a:rPr lang="zh-CN" sz="1100" dirty="0">
                 <a:solidFill>
                   <a:srgbClr val="142A38"/>
                 </a:solidFill>
@@ -4920,7 +4925,7 @@
               </a:rPr>
               <a:t>Representative Platforms</a:t>
             </a:r>
-            <a:endParaRPr lang="zh-CN" sz="1050" dirty="0"/>
+            <a:endParaRPr lang="zh-CN" sz="1100" dirty="0"/>
           </a:p>
         </p:txBody>
       </p:sp>
@@ -4951,7 +4956,7 @@
           <a:p>
             <a:pPr algn="ctr"/>
             <a:r>
-              <a:rPr lang="zh-CN" sz="800" dirty="0">
+              <a:rPr lang="zh-CN" sz="1100" dirty="0">
                 <a:solidFill>
                   <a:srgbClr val="142A38"/>
                 </a:solidFill>
@@ -4961,7 +4966,7 @@
               </a:rPr>
               <a:t>STORM</a:t>
             </a:r>
-            <a:endParaRPr lang="zh-CN" sz="800" dirty="0"/>
+            <a:endParaRPr lang="zh-CN" sz="1100" dirty="0"/>
           </a:p>
         </p:txBody>
       </p:sp>
@@ -4992,7 +4997,7 @@
           <a:p>
             <a:pPr algn="ctr"/>
             <a:r>
-              <a:rPr lang="zh-CN" sz="800" dirty="0">
+              <a:rPr lang="zh-CN" sz="1100" dirty="0">
                 <a:solidFill>
                   <a:srgbClr val="142A38"/>
                 </a:solidFill>
@@ -5002,7 +5007,7 @@
               </a:rPr>
               <a:t>Co-STORM</a:t>
             </a:r>
-            <a:endParaRPr lang="zh-CN" sz="800" dirty="0"/>
+            <a:endParaRPr lang="zh-CN" sz="1100" dirty="0"/>
           </a:p>
         </p:txBody>
       </p:sp>
@@ -5033,7 +5038,7 @@
           <a:p>
             <a:pPr algn="ctr"/>
             <a:r>
-              <a:rPr lang="zh-CN" sz="800" dirty="0">
+              <a:rPr lang="zh-CN" sz="1100" dirty="0">
                 <a:solidFill>
                   <a:srgbClr val="142A38"/>
                 </a:solidFill>
@@ -5043,7 +5048,7 @@
               </a:rPr>
               <a:t>RAGFlow</a:t>
             </a:r>
-            <a:endParaRPr lang="zh-CN" sz="800" dirty="0"/>
+            <a:endParaRPr lang="zh-CN" sz="1100" dirty="0"/>
           </a:p>
         </p:txBody>
       </p:sp>
@@ -5074,7 +5079,7 @@
           <a:p>
             <a:pPr algn="ctr"/>
             <a:r>
-              <a:rPr lang="zh-CN" sz="1000" dirty="0">
+              <a:rPr lang="zh-CN" sz="1100" dirty="0">
                 <a:solidFill>
                   <a:srgbClr val="142A38"/>
                 </a:solidFill>
@@ -5084,12 +5089,12 @@
               </a:rPr>
               <a:t>Retrieval-Grounded</a:t>
             </a:r>
-            <a:endParaRPr lang="zh-CN" sz="1000" dirty="0"/>
+            <a:endParaRPr lang="zh-CN" sz="1100" dirty="0"/>
           </a:p>
           <a:p>
             <a:pPr algn="ctr"/>
             <a:r>
-              <a:rPr lang="zh-CN" sz="1000" dirty="0">
+              <a:rPr lang="zh-CN" sz="1100" dirty="0">
                 <a:solidFill>
                   <a:srgbClr val="142A38"/>
                 </a:solidFill>
@@ -5099,7 +5104,7 @@
               </a:rPr>
               <a:t>Synthesis</a:t>
             </a:r>
-            <a:endParaRPr lang="zh-CN" sz="1000" dirty="0"/>
+            <a:endParaRPr lang="zh-CN" sz="1100" dirty="0"/>
           </a:p>
         </p:txBody>
       </p:sp>
@@ -5130,7 +5135,7 @@
           <a:p>
             <a:pPr algn="ctr"/>
             <a:r>
-              <a:rPr lang="zh-CN" sz="1000" dirty="0">
+              <a:rPr lang="zh-CN" sz="1100" dirty="0">
                 <a:solidFill>
                   <a:srgbClr val="142A38"/>
                 </a:solidFill>
@@ -5140,12 +5145,12 @@
               </a:rPr>
               <a:t>Document</a:t>
             </a:r>
-            <a:endParaRPr lang="zh-CN" sz="1000" dirty="0"/>
+            <a:endParaRPr lang="zh-CN" sz="1100" dirty="0"/>
           </a:p>
           <a:p>
             <a:pPr algn="ctr"/>
             <a:r>
-              <a:rPr lang="zh-CN" sz="1000" dirty="0">
+              <a:rPr lang="zh-CN" sz="1100" dirty="0">
                 <a:solidFill>
                   <a:srgbClr val="142A38"/>
                 </a:solidFill>
@@ -5155,7 +5160,7 @@
               </a:rPr>
               <a:t>Understanding</a:t>
             </a:r>
-            <a:endParaRPr lang="zh-CN" sz="1000" dirty="0"/>
+            <a:endParaRPr lang="zh-CN" sz="1100" dirty="0"/>
           </a:p>
         </p:txBody>
       </p:sp>
@@ -5186,7 +5191,7 @@
           <a:p>
             <a:pPr algn="ctr"/>
             <a:r>
-              <a:rPr lang="zh-CN" sz="1000" b="1" dirty="0">
+              <a:rPr lang="zh-CN" sz="1100" b="1" dirty="0">
                 <a:solidFill>
                   <a:srgbClr val="142A38"/>
                 </a:solidFill>
@@ -5196,12 +5201,12 @@
               </a:rPr>
               <a:t>Benchmarks &amp;</a:t>
             </a:r>
-            <a:endParaRPr lang="zh-CN" sz="1000" dirty="0"/>
+            <a:endParaRPr lang="zh-CN" sz="1100" dirty="0"/>
           </a:p>
           <a:p>
             <a:pPr algn="ctr"/>
             <a:r>
-              <a:rPr lang="zh-CN" sz="1000" b="1" dirty="0">
+              <a:rPr lang="zh-CN" sz="1100" b="1" dirty="0">
                 <a:solidFill>
                   <a:srgbClr val="142A38"/>
                 </a:solidFill>
@@ -5211,7 +5216,7 @@
               </a:rPr>
               <a:t>Evaluation Tools</a:t>
             </a:r>
-            <a:endParaRPr lang="zh-CN" sz="1000" dirty="0"/>
+            <a:endParaRPr lang="zh-CN" sz="1100" dirty="0"/>
           </a:p>
         </p:txBody>
       </p:sp>
@@ -5242,7 +5247,7 @@
           <a:p>
             <a:pPr algn="ctr"/>
             <a:r>
-              <a:rPr lang="zh-CN" sz="1000" b="1" dirty="0">
+              <a:rPr lang="zh-CN" sz="1100" b="1" dirty="0">
                 <a:solidFill>
                   <a:srgbClr val="142A38"/>
                 </a:solidFill>
@@ -5252,7 +5257,7 @@
               </a:rPr>
               <a:t>QA &amp; knowledge benchmarks</a:t>
             </a:r>
-            <a:endParaRPr lang="zh-CN" sz="1000" dirty="0"/>
+            <a:endParaRPr lang="zh-CN" sz="1100" dirty="0"/>
           </a:p>
         </p:txBody>
       </p:sp>
@@ -5283,7 +5288,7 @@
           <a:p>
             <a:pPr algn="ctr"/>
             <a:r>
-              <a:rPr lang="zh-CN" sz="800" dirty="0">
+              <a:rPr lang="zh-CN" sz="1100" dirty="0">
                 <a:solidFill>
                   <a:srgbClr val="142A38"/>
                 </a:solidFill>
@@ -5293,7 +5298,7 @@
               </a:rPr>
               <a:t>HotpotQA</a:t>
             </a:r>
-            <a:endParaRPr lang="zh-CN" sz="800" dirty="0"/>
+            <a:endParaRPr lang="zh-CN" sz="1100" dirty="0"/>
           </a:p>
         </p:txBody>
       </p:sp>
@@ -5365,7 +5370,7 @@
           <a:p>
             <a:pPr algn="ctr"/>
             <a:r>
-              <a:rPr lang="zh-CN" sz="800" dirty="0">
+              <a:rPr lang="zh-CN" sz="1100" dirty="0">
                 <a:solidFill>
                   <a:srgbClr val="142A38"/>
                 </a:solidFill>
@@ -5375,7 +5380,7 @@
               </a:rPr>
               <a:t>CoQA</a:t>
             </a:r>
-            <a:endParaRPr lang="zh-CN" sz="800" dirty="0"/>
+            <a:endParaRPr lang="zh-CN" sz="1100" dirty="0"/>
           </a:p>
         </p:txBody>
       </p:sp>
@@ -5406,7 +5411,7 @@
           <a:p>
             <a:pPr algn="ctr"/>
             <a:r>
-              <a:rPr lang="zh-CN" sz="800" dirty="0">
+              <a:rPr lang="zh-CN" sz="1100" dirty="0">
                 <a:solidFill>
                   <a:srgbClr val="142A38"/>
                 </a:solidFill>
@@ -5416,7 +5421,7 @@
               </a:rPr>
               <a:t>MMLU</a:t>
             </a:r>
-            <a:endParaRPr lang="zh-CN" sz="800" dirty="0"/>
+            <a:endParaRPr lang="zh-CN" sz="1100" dirty="0"/>
           </a:p>
         </p:txBody>
       </p:sp>
@@ -5447,7 +5452,7 @@
           <a:p>
             <a:pPr algn="ctr"/>
             <a:r>
-              <a:rPr lang="zh-CN" sz="800" dirty="0">
+              <a:rPr lang="zh-CN" sz="1100" dirty="0">
                 <a:solidFill>
                   <a:srgbClr val="142A38"/>
                 </a:solidFill>
@@ -5457,7 +5462,7 @@
               </a:rPr>
               <a:t>MuSiQue</a:t>
             </a:r>
-            <a:endParaRPr lang="zh-CN" sz="800" dirty="0"/>
+            <a:endParaRPr lang="zh-CN" sz="1100" dirty="0"/>
           </a:p>
         </p:txBody>
       </p:sp>
@@ -5488,7 +5493,7 @@
           <a:p>
             <a:pPr algn="ctr"/>
             <a:r>
-              <a:rPr lang="zh-CN" sz="1000" b="1" dirty="0">
+              <a:rPr lang="zh-CN" sz="1100" b="1" dirty="0">
                 <a:solidFill>
                   <a:srgbClr val="142A38"/>
                 </a:solidFill>
@@ -5498,7 +5503,7 @@
               </a:rPr>
               <a:t>Agent-task benchmarks</a:t>
             </a:r>
-            <a:endParaRPr lang="zh-CN" sz="1000" dirty="0"/>
+            <a:endParaRPr lang="zh-CN" sz="1100" dirty="0"/>
           </a:p>
         </p:txBody>
       </p:sp>
@@ -5529,7 +5534,7 @@
           <a:p>
             <a:pPr algn="ctr"/>
             <a:r>
-              <a:rPr lang="zh-CN" sz="800" dirty="0">
+              <a:rPr lang="zh-CN" sz="1100" dirty="0">
                 <a:solidFill>
                   <a:srgbClr val="142A38"/>
                 </a:solidFill>
@@ -5539,7 +5544,7 @@
               </a:rPr>
               <a:t>AgentBench</a:t>
             </a:r>
-            <a:endParaRPr lang="zh-CN" sz="800" dirty="0"/>
+            <a:endParaRPr lang="zh-CN" sz="1100" dirty="0"/>
           </a:p>
         </p:txBody>
       </p:sp>
@@ -5570,7 +5575,7 @@
           <a:p>
             <a:pPr algn="ctr"/>
             <a:r>
-              <a:rPr lang="zh-CN" sz="800" dirty="0">
+              <a:rPr lang="zh-CN" sz="1100" dirty="0">
                 <a:solidFill>
                   <a:srgbClr val="142A38"/>
                 </a:solidFill>
@@ -5580,7 +5585,7 @@
               </a:rPr>
               <a:t>GAIA</a:t>
             </a:r>
-            <a:endParaRPr lang="zh-CN" sz="800" dirty="0"/>
+            <a:endParaRPr lang="zh-CN" sz="1100" dirty="0"/>
           </a:p>
         </p:txBody>
       </p:sp>
@@ -5611,7 +5616,7 @@
           <a:p>
             <a:pPr algn="ctr"/>
             <a:r>
-              <a:rPr lang="zh-CN" sz="800" dirty="0">
+              <a:rPr lang="zh-CN" sz="1100" dirty="0">
                 <a:solidFill>
                   <a:srgbClr val="142A38"/>
                 </a:solidFill>
@@ -5621,7 +5626,7 @@
               </a:rPr>
               <a:t>WebArena</a:t>
             </a:r>
-            <a:endParaRPr lang="zh-CN" sz="800" dirty="0"/>
+            <a:endParaRPr lang="zh-CN" sz="1100" dirty="0"/>
           </a:p>
         </p:txBody>
       </p:sp>
@@ -5652,7 +5657,7 @@
           <a:p>
             <a:pPr algn="ctr"/>
             <a:r>
-              <a:rPr lang="zh-CN" sz="1000" b="1" dirty="0">
+              <a:rPr lang="zh-CN" sz="1100" b="1" dirty="0">
                 <a:solidFill>
                   <a:srgbClr val="142A38"/>
                 </a:solidFill>
@@ -5662,7 +5667,7 @@
               </a:rPr>
               <a:t>RAG tool: AutoRAG</a:t>
             </a:r>
-            <a:endParaRPr lang="zh-CN" sz="1000" dirty="0"/>
+            <a:endParaRPr lang="zh-CN" sz="1100" dirty="0"/>
           </a:p>
         </p:txBody>
       </p:sp>
@@ -5693,7 +5698,7 @@
           <a:p>
             <a:pPr algn="ctr"/>
             <a:r>
-              <a:rPr lang="zh-CN" sz="1000" dirty="0">
+              <a:rPr lang="zh-CN" sz="1100" dirty="0">
                 <a:solidFill>
                   <a:srgbClr val="142A38"/>
                 </a:solidFill>
@@ -5703,12 +5708,12 @@
               </a:rPr>
               <a:t>Answer &amp; Task</a:t>
             </a:r>
-            <a:endParaRPr lang="zh-CN" sz="1000" dirty="0"/>
+            <a:endParaRPr lang="zh-CN" sz="1100" dirty="0"/>
           </a:p>
           <a:p>
             <a:pPr algn="ctr"/>
             <a:r>
-              <a:rPr lang="zh-CN" sz="1000" dirty="0">
+              <a:rPr lang="zh-CN" sz="1100" dirty="0">
                 <a:solidFill>
                   <a:srgbClr val="142A38"/>
                 </a:solidFill>
@@ -5718,7 +5723,7 @@
               </a:rPr>
               <a:t>Assessment</a:t>
             </a:r>
-            <a:endParaRPr lang="zh-CN" sz="1000" dirty="0"/>
+            <a:endParaRPr lang="zh-CN" sz="1100" dirty="0"/>
           </a:p>
         </p:txBody>
       </p:sp>
@@ -5749,7 +5754,7 @@
           <a:p>
             <a:pPr algn="ctr"/>
             <a:r>
-              <a:rPr lang="zh-CN" sz="1000" dirty="0">
+              <a:rPr lang="zh-CN" sz="1100" dirty="0">
                 <a:solidFill>
                   <a:srgbClr val="142A38"/>
                 </a:solidFill>
@@ -5759,12 +5764,12 @@
               </a:rPr>
               <a:t>RAG Component</a:t>
             </a:r>
-            <a:endParaRPr lang="zh-CN" sz="1000" dirty="0"/>
+            <a:endParaRPr lang="zh-CN" sz="1100" dirty="0"/>
           </a:p>
           <a:p>
             <a:pPr algn="ctr"/>
             <a:r>
-              <a:rPr lang="zh-CN" sz="1000" dirty="0">
+              <a:rPr lang="zh-CN" sz="1100" dirty="0">
                 <a:solidFill>
                   <a:srgbClr val="142A38"/>
                 </a:solidFill>
@@ -5774,7 +5779,7 @@
               </a:rPr>
               <a:t>Evaluation</a:t>
             </a:r>
-            <a:endParaRPr lang="zh-CN" sz="1000" dirty="0"/>
+            <a:endParaRPr lang="zh-CN" sz="1100" dirty="0"/>
           </a:p>
         </p:txBody>
       </p:sp>
@@ -5846,7 +5851,7 @@
           <a:p>
             <a:pPr algn="ctr"/>
             <a:r>
-              <a:rPr lang="zh-CN" sz="1000" b="1" dirty="0">
+              <a:rPr lang="zh-CN" sz="1200" b="1" dirty="0">
                 <a:solidFill>
                   <a:srgbClr val="FFFFFF"/>
                 </a:solidFill>
@@ -5856,12 +5861,12 @@
               </a:rPr>
               <a:t>Multi-Agent</a:t>
             </a:r>
-            <a:endParaRPr lang="zh-CN" sz="1000" dirty="0"/>
+            <a:endParaRPr lang="zh-CN" sz="1200" dirty="0"/>
           </a:p>
           <a:p>
             <a:pPr algn="ctr"/>
             <a:r>
-              <a:rPr lang="zh-CN" sz="1000" b="1" dirty="0">
+              <a:rPr lang="zh-CN" sz="1200" b="1" dirty="0">
                 <a:solidFill>
                   <a:srgbClr val="FFFFFF"/>
                 </a:solidFill>
@@ -5871,7 +5876,7 @@
               </a:rPr>
               <a:t>QA System</a:t>
             </a:r>
-            <a:endParaRPr lang="zh-CN" sz="1000" dirty="0"/>
+            <a:endParaRPr lang="zh-CN" sz="1200" dirty="0"/>
           </a:p>
         </p:txBody>
       </p:sp>
@@ -5902,7 +5907,7 @@
           <a:p>
             <a:pPr algn="ctr"/>
             <a:r>
-              <a:rPr lang="zh-CN" sz="1000" dirty="0">
+              <a:rPr lang="zh-CN" sz="1100" dirty="0">
                 <a:solidFill>
                   <a:srgbClr val="142A38"/>
                 </a:solidFill>
@@ -5912,12 +5917,12 @@
               </a:rPr>
               <a:t>System Construction</a:t>
             </a:r>
-            <a:endParaRPr lang="zh-CN" sz="1000" dirty="0"/>
+            <a:endParaRPr lang="zh-CN" sz="1100" dirty="0"/>
           </a:p>
           <a:p>
             <a:pPr algn="ctr"/>
             <a:r>
-              <a:rPr lang="zh-CN" sz="1000" dirty="0">
+              <a:rPr lang="zh-CN" sz="1100" dirty="0">
                 <a:solidFill>
                   <a:srgbClr val="142A38"/>
                 </a:solidFill>
@@ -5927,7 +5932,7 @@
               </a:rPr>
               <a:t>&amp; Evaluation</a:t>
             </a:r>
-            <a:endParaRPr lang="zh-CN" sz="1000" dirty="0"/>
+            <a:endParaRPr lang="zh-CN" sz="1100" dirty="0"/>
           </a:p>
         </p:txBody>
       </p:sp>
@@ -5958,7 +5963,7 @@
           <a:p>
             <a:pPr algn="ctr"/>
             <a:r>
-              <a:rPr lang="zh-CN" sz="1209" dirty="0">
+              <a:rPr lang="zh-CN" sz="1250" dirty="0">
                 <a:solidFill>
                   <a:srgbClr val="607181"/>
                 </a:solidFill>
@@ -5968,7 +5973,7 @@
               </a:rPr>
               <a:t>Conceptual resource map; process assessment needs trace-level measures.</a:t>
             </a:r>
-            <a:endParaRPr lang="zh-CN" sz="1209" dirty="0"/>
+            <a:endParaRPr lang="zh-CN" sz="1250" dirty="0"/>
           </a:p>
         </p:txBody>
       </p:sp>
@@ -6125,4 +6130,10 @@
   <a:objectDefaults/>
   <a:extraClrSchemeLst/>
 </a:theme>
+</file>
+
+<file path=docMetadata/LabelInfo.xml><?xml version="1.0" encoding="utf-8"?>
+<clbl:labelList xmlns:clbl="http://schemas.microsoft.com/office/2020/mipLabelMetadata">
+  <clbl:label id="{c2917835-e376-4a9b-97c4-07e18331d57c}" enabled="1" method="Standard" siteId="{4944a6fe-8b0f-447a-8e35-cec5e80a5ce0}" contentBits="0" removed="0"/>
+</clbl:labelList>
 </file>